--- a/output_pptx/Holy_Forever.pptx
+++ b/output_pptx/Holy_Forever.pptx
@@ -3126,23 +3126,23 @@
         </p:nvSpPr>
         <p:spPr>
           <a:xfrm>
-            <a:off x="594360" y="2258568"/>
-            <a:ext cx="11002975" cy="685800"/>
-          </a:xfrm>
-          <a:prstGeom prst="rect">
-            <a:avLst/>
-          </a:prstGeom>
-          <a:noFill/>
-        </p:spPr>
-        <p:txBody>
-          <a:bodyPr wrap="square">
-            <a:spAutoFit/>
-          </a:bodyPr>
-          <a:lstStyle/>
-          <a:p>
-            <a:pPr algn="ctr"/>
-            <a:r>
-              <a:rPr sz="4400" b="1" i="0">
+            <a:off x="640080" y="2052828"/>
+            <a:ext cx="10911535" cy="731520"/>
+          </a:xfrm>
+          <a:prstGeom prst="rect">
+            <a:avLst/>
+          </a:prstGeom>
+          <a:noFill/>
+        </p:spPr>
+        <p:txBody>
+          <a:bodyPr wrap="square">
+            <a:spAutoFit/>
+          </a:bodyPr>
+          <a:lstStyle/>
+          <a:p>
+            <a:pPr algn="ctr"/>
+            <a:r>
+              <a:rPr sz="4800" b="1" i="0">
                 <a:solidFill>
                   <a:srgbClr val="FFFFFF"/>
                 </a:solidFill>
@@ -3161,99 +3161,29 @@
         </p:nvSpPr>
         <p:spPr>
           <a:xfrm>
-            <a:off x="594360" y="2980944"/>
-            <a:ext cx="11002975" cy="347472"/>
-          </a:xfrm>
-          <a:prstGeom prst="rect">
-            <a:avLst/>
-          </a:prstGeom>
-          <a:noFill/>
-        </p:spPr>
-        <p:txBody>
-          <a:bodyPr wrap="square">
-            <a:spAutoFit/>
-          </a:bodyPr>
-          <a:lstStyle/>
-          <a:p>
-            <a:pPr algn="ctr"/>
-            <a:r>
-              <a:rPr sz="2200" b="0" i="1">
-                <a:solidFill>
-                  <a:srgbClr val="8C8C8C"/>
-                </a:solidFill>
-                <a:latin typeface="Arial"/>
-              </a:rPr>
-              <a:t/>
-            </a:r>
-          </a:p>
-        </p:txBody>
-      </p:sp>
-      <p:sp>
-        <p:nvSpPr>
-          <p:cNvPr id="4" name="TextBox 3"/>
-          <p:cNvSpPr txBox="1"/>
-          <p:nvPr/>
-        </p:nvSpPr>
-        <p:spPr>
-          <a:xfrm>
-            <a:off x="594360" y="3529584"/>
-            <a:ext cx="11002975" cy="685800"/>
-          </a:xfrm>
-          <a:prstGeom prst="rect">
-            <a:avLst/>
-          </a:prstGeom>
-          <a:noFill/>
-        </p:spPr>
-        <p:txBody>
-          <a:bodyPr wrap="square">
-            <a:spAutoFit/>
-          </a:bodyPr>
-          <a:lstStyle/>
-          <a:p>
-            <a:pPr algn="ctr"/>
-            <a:r>
-              <a:rPr sz="4400" b="1" i="0">
+            <a:off x="640080" y="2985516"/>
+            <a:ext cx="10911535" cy="731520"/>
+          </a:xfrm>
+          <a:prstGeom prst="rect">
+            <a:avLst/>
+          </a:prstGeom>
+          <a:noFill/>
+        </p:spPr>
+        <p:txBody>
+          <a:bodyPr wrap="square">
+            <a:spAutoFit/>
+          </a:bodyPr>
+          <a:lstStyle/>
+          <a:p>
+            <a:pPr algn="ctr"/>
+            <a:r>
+              <a:rPr sz="4800" b="1" i="0">
                 <a:solidFill>
                   <a:srgbClr val="FFFFFF"/>
                 </a:solidFill>
                 <a:latin typeface="Arial"/>
               </a:rPr>
               <a:t>Rendidas em louvor</a:t>
-            </a:r>
-          </a:p>
-        </p:txBody>
-      </p:sp>
-      <p:sp>
-        <p:nvSpPr>
-          <p:cNvPr id="5" name="TextBox 4"/>
-          <p:cNvSpPr txBox="1"/>
-          <p:nvPr/>
-        </p:nvSpPr>
-        <p:spPr>
-          <a:xfrm>
-            <a:off x="594360" y="4251960"/>
-            <a:ext cx="11002975" cy="347472"/>
-          </a:xfrm>
-          <a:prstGeom prst="rect">
-            <a:avLst/>
-          </a:prstGeom>
-          <a:noFill/>
-        </p:spPr>
-        <p:txBody>
-          <a:bodyPr wrap="square">
-            <a:spAutoFit/>
-          </a:bodyPr>
-          <a:lstStyle/>
-          <a:p>
-            <a:pPr algn="ctr"/>
-            <a:r>
-              <a:rPr sz="2200" b="0" i="1">
-                <a:solidFill>
-                  <a:srgbClr val="8C8C8C"/>
-                </a:solidFill>
-                <a:latin typeface="Arial"/>
-              </a:rPr>
-              <a:t/>
             </a:r>
           </a:p>
         </p:txBody>
@@ -3292,23 +3222,23 @@
         </p:nvSpPr>
         <p:spPr>
           <a:xfrm>
-            <a:off x="594360" y="1837944"/>
-            <a:ext cx="11002975" cy="685800"/>
-          </a:xfrm>
-          <a:prstGeom prst="rect">
-            <a:avLst/>
-          </a:prstGeom>
-          <a:noFill/>
-        </p:spPr>
-        <p:txBody>
-          <a:bodyPr wrap="square">
-            <a:spAutoFit/>
-          </a:bodyPr>
-          <a:lstStyle/>
-          <a:p>
-            <a:pPr algn="ctr"/>
-            <a:r>
-              <a:rPr sz="4400" b="1" i="0">
+            <a:off x="640080" y="1650492"/>
+            <a:ext cx="10911535" cy="731520"/>
+          </a:xfrm>
+          <a:prstGeom prst="rect">
+            <a:avLst/>
+          </a:prstGeom>
+          <a:noFill/>
+        </p:spPr>
+        <p:txBody>
+          <a:bodyPr wrap="square">
+            <a:spAutoFit/>
+          </a:bodyPr>
+          <a:lstStyle/>
+          <a:p>
+            <a:pPr algn="ctr"/>
+            <a:r>
+              <a:rPr sz="4800" b="1" i="0">
                 <a:solidFill>
                   <a:srgbClr val="FFFFFF"/>
                 </a:solidFill>
@@ -3327,8 +3257,8 @@
         </p:nvSpPr>
         <p:spPr>
           <a:xfrm>
-            <a:off x="594360" y="2560320"/>
-            <a:ext cx="11002975" cy="384048"/>
+            <a:off x="640080" y="2418588"/>
+            <a:ext cx="10911535" cy="365760"/>
           </a:xfrm>
           <a:prstGeom prst="rect">
             <a:avLst/>
@@ -3345,7 +3275,7 @@
             <a:r>
               <a:rPr sz="2400" b="0" i="1">
                 <a:solidFill>
-                  <a:srgbClr val="B4B4B4"/>
+                  <a:srgbClr val="AAAAAA"/>
                 </a:solidFill>
                 <a:latin typeface="Arial"/>
               </a:rPr>
@@ -3362,8 +3292,78 @@
         </p:nvSpPr>
         <p:spPr>
           <a:xfrm>
-            <a:off x="594360" y="2980944"/>
-            <a:ext cx="11002975" cy="347472"/>
+            <a:off x="640080" y="2985516"/>
+            <a:ext cx="10911535" cy="731520"/>
+          </a:xfrm>
+          <a:prstGeom prst="rect">
+            <a:avLst/>
+          </a:prstGeom>
+          <a:noFill/>
+        </p:spPr>
+        <p:txBody>
+          <a:bodyPr wrap="square">
+            <a:spAutoFit/>
+          </a:bodyPr>
+          <a:lstStyle/>
+          <a:p>
+            <a:pPr algn="ctr"/>
+            <a:r>
+              <a:rPr sz="4800" b="1" i="0">
+                <a:solidFill>
+                  <a:srgbClr val="FFFFFF"/>
+                </a:solidFill>
+                <a:latin typeface="Arial"/>
+              </a:rPr>
+              <a:t>神の子羊イエスに</a:t>
+            </a:r>
+          </a:p>
+        </p:txBody>
+      </p:sp>
+      <p:sp>
+        <p:nvSpPr>
+          <p:cNvPr id="5" name="TextBox 4"/>
+          <p:cNvSpPr txBox="1"/>
+          <p:nvPr/>
+        </p:nvSpPr>
+        <p:spPr>
+          <a:xfrm>
+            <a:off x="640080" y="3753612"/>
+            <a:ext cx="10911535" cy="365760"/>
+          </a:xfrm>
+          <a:prstGeom prst="rect">
+            <a:avLst/>
+          </a:prstGeom>
+          <a:noFill/>
+        </p:spPr>
+        <p:txBody>
+          <a:bodyPr wrap="square">
+            <a:spAutoFit/>
+          </a:bodyPr>
+          <a:lstStyle/>
+          <a:p>
+            <a:pPr algn="ctr"/>
+            <a:r>
+              <a:rPr sz="2400" b="0" i="1">
+                <a:solidFill>
+                  <a:srgbClr val="AAAAAA"/>
+                </a:solidFill>
+                <a:latin typeface="Arial"/>
+              </a:rPr>
+              <a:t>kami no kohitsuji Iesu ni</a:t>
+            </a:r>
+          </a:p>
+        </p:txBody>
+      </p:sp>
+      <p:sp>
+        <p:nvSpPr>
+          <p:cNvPr id="6" name="TextBox 5"/>
+          <p:cNvSpPr txBox="1"/>
+          <p:nvPr/>
+        </p:nvSpPr>
+        <p:spPr>
+          <a:xfrm>
+            <a:off x="640080" y="4530852"/>
+            <a:ext cx="10911535" cy="310896"/>
           </a:xfrm>
           <a:prstGeom prst="rect">
             <a:avLst/>
@@ -3380,81 +3380,11 @@
             <a:r>
               <a:rPr sz="2000" b="0" i="1">
                 <a:solidFill>
-                  <a:srgbClr val="8C8C8C"/>
-                </a:solidFill>
-                <a:latin typeface="Arial"/>
-              </a:rPr>
-              <a:t/>
-            </a:r>
-          </a:p>
-        </p:txBody>
-      </p:sp>
-      <p:sp>
-        <p:nvSpPr>
-          <p:cNvPr id="5" name="TextBox 4"/>
-          <p:cNvSpPr txBox="1"/>
-          <p:nvPr/>
-        </p:nvSpPr>
-        <p:spPr>
-          <a:xfrm>
-            <a:off x="594360" y="3529584"/>
-            <a:ext cx="11002975" cy="685800"/>
-          </a:xfrm>
-          <a:prstGeom prst="rect">
-            <a:avLst/>
-          </a:prstGeom>
-          <a:noFill/>
-        </p:spPr>
-        <p:txBody>
-          <a:bodyPr wrap="square">
-            <a:spAutoFit/>
-          </a:bodyPr>
-          <a:lstStyle/>
-          <a:p>
-            <a:pPr algn="ctr"/>
-            <a:r>
-              <a:rPr sz="4400" b="1" i="0">
-                <a:solidFill>
-                  <a:srgbClr val="FFFFFF"/>
-                </a:solidFill>
-                <a:latin typeface="Arial"/>
-              </a:rPr>
-              <a:t>神の子羊イエスに</a:t>
-            </a:r>
-          </a:p>
-        </p:txBody>
-      </p:sp>
-      <p:sp>
-        <p:nvSpPr>
-          <p:cNvPr id="6" name="TextBox 5"/>
-          <p:cNvSpPr txBox="1"/>
-          <p:nvPr/>
-        </p:nvSpPr>
-        <p:spPr>
-          <a:xfrm>
-            <a:off x="594360" y="4251960"/>
-            <a:ext cx="11002975" cy="384048"/>
-          </a:xfrm>
-          <a:prstGeom prst="rect">
-            <a:avLst/>
-          </a:prstGeom>
-          <a:noFill/>
-        </p:spPr>
-        <p:txBody>
-          <a:bodyPr wrap="square">
-            <a:spAutoFit/>
-          </a:bodyPr>
-          <a:lstStyle/>
-          <a:p>
-            <a:pPr algn="ctr"/>
-            <a:r>
-              <a:rPr sz="2400" b="0" i="1">
-                <a:solidFill>
-                  <a:srgbClr val="B4B4B4"/>
-                </a:solidFill>
-                <a:latin typeface="Arial"/>
-              </a:rPr>
-              <a:t>kami no kohitsuji Iesu ni</a:t>
+                  <a:srgbClr val="828282"/>
+                </a:solidFill>
+                <a:latin typeface="Arial"/>
+              </a:rPr>
+              <a:t>Cantando ao Cordeiro uma canção</a:t>
             </a:r>
           </a:p>
         </p:txBody>
@@ -3467,8 +3397,8 @@
         </p:nvSpPr>
         <p:spPr>
           <a:xfrm>
-            <a:off x="594360" y="4672584"/>
-            <a:ext cx="11002975" cy="347472"/>
+            <a:off x="640080" y="4896612"/>
+            <a:ext cx="10911535" cy="310896"/>
           </a:xfrm>
           <a:prstGeom prst="rect">
             <a:avLst/>
@@ -3485,11 +3415,11 @@
             <a:r>
               <a:rPr sz="2000" b="0" i="1">
                 <a:solidFill>
-                  <a:srgbClr val="8C8C8C"/>
-                </a:solidFill>
-                <a:latin typeface="Arial"/>
-              </a:rPr>
-              <a:t/>
+                  <a:srgbClr val="828282"/>
+                </a:solidFill>
+                <a:latin typeface="Arial"/>
+              </a:rPr>
+              <a:t>Os que em Ti se foram</a:t>
             </a:r>
           </a:p>
         </p:txBody>
@@ -3528,23 +3458,23 @@
         </p:nvSpPr>
         <p:spPr>
           <a:xfrm>
-            <a:off x="594360" y="2683764"/>
-            <a:ext cx="11002975" cy="685800"/>
-          </a:xfrm>
-          <a:prstGeom prst="rect">
-            <a:avLst/>
-          </a:prstGeom>
-          <a:noFill/>
-        </p:spPr>
-        <p:txBody>
-          <a:bodyPr wrap="square">
-            <a:spAutoFit/>
-          </a:bodyPr>
-          <a:lstStyle/>
-          <a:p>
-            <a:pPr algn="ctr"/>
-            <a:r>
-              <a:rPr sz="4400" b="1" i="0">
+            <a:off x="640080" y="2500884"/>
+            <a:ext cx="10911535" cy="731520"/>
+          </a:xfrm>
+          <a:prstGeom prst="rect">
+            <a:avLst/>
+          </a:prstGeom>
+          <a:noFill/>
+        </p:spPr>
+        <p:txBody>
+          <a:bodyPr wrap="square">
+            <a:spAutoFit/>
+          </a:bodyPr>
+          <a:lstStyle/>
+          <a:p>
+            <a:pPr algn="ctr"/>
+            <a:r>
+              <a:rPr sz="4800" b="1" i="0">
                 <a:solidFill>
                   <a:srgbClr val="FFFFFF"/>
                 </a:solidFill>
@@ -3563,8 +3493,8 @@
         </p:nvSpPr>
         <p:spPr>
           <a:xfrm>
-            <a:off x="594360" y="3406140"/>
-            <a:ext cx="11002975" cy="384048"/>
+            <a:off x="640080" y="3268980"/>
+            <a:ext cx="10911535" cy="365760"/>
           </a:xfrm>
           <a:prstGeom prst="rect">
             <a:avLst/>
@@ -3581,7 +3511,7 @@
             <a:r>
               <a:rPr sz="2400" b="0" i="1">
                 <a:solidFill>
-                  <a:srgbClr val="B4B4B4"/>
+                  <a:srgbClr val="AAAAAA"/>
                 </a:solidFill>
                 <a:latin typeface="Arial"/>
               </a:rPr>
@@ -3598,8 +3528,8 @@
         </p:nvSpPr>
         <p:spPr>
           <a:xfrm>
-            <a:off x="594360" y="3826764"/>
-            <a:ext cx="11002975" cy="347472"/>
+            <a:off x="640080" y="4046220"/>
+            <a:ext cx="10911535" cy="310896"/>
           </a:xfrm>
           <a:prstGeom prst="rect">
             <a:avLst/>
@@ -3616,11 +3546,11 @@
             <a:r>
               <a:rPr sz="2000" b="0" i="1">
                 <a:solidFill>
-                  <a:srgbClr val="8C8C8C"/>
-                </a:solidFill>
-                <a:latin typeface="Arial"/>
-              </a:rPr>
-              <a:t/>
+                  <a:srgbClr val="828282"/>
+                </a:solidFill>
+                <a:latin typeface="Arial"/>
+              </a:rPr>
+              <a:t>E os que hão de crer</a:t>
             </a:r>
           </a:p>
         </p:txBody>
@@ -3659,23 +3589,23 @@
         </p:nvSpPr>
         <p:spPr>
           <a:xfrm>
-            <a:off x="594360" y="1837944"/>
-            <a:ext cx="11002975" cy="685800"/>
-          </a:xfrm>
-          <a:prstGeom prst="rect">
-            <a:avLst/>
-          </a:prstGeom>
-          <a:noFill/>
-        </p:spPr>
-        <p:txBody>
-          <a:bodyPr wrap="square">
-            <a:spAutoFit/>
-          </a:bodyPr>
-          <a:lstStyle/>
-          <a:p>
-            <a:pPr algn="ctr"/>
-            <a:r>
-              <a:rPr sz="4400" b="1" i="0">
+            <a:off x="640080" y="1650492"/>
+            <a:ext cx="10911535" cy="731520"/>
+          </a:xfrm>
+          <a:prstGeom prst="rect">
+            <a:avLst/>
+          </a:prstGeom>
+          <a:noFill/>
+        </p:spPr>
+        <p:txBody>
+          <a:bodyPr wrap="square">
+            <a:spAutoFit/>
+          </a:bodyPr>
+          <a:lstStyle/>
+          <a:p>
+            <a:pPr algn="ctr"/>
+            <a:r>
+              <a:rPr sz="4800" b="1" i="0">
                 <a:solidFill>
                   <a:srgbClr val="FFFFFF"/>
                 </a:solidFill>
@@ -3694,8 +3624,8 @@
         </p:nvSpPr>
         <p:spPr>
           <a:xfrm>
-            <a:off x="594360" y="2560320"/>
-            <a:ext cx="11002975" cy="384048"/>
+            <a:off x="640080" y="2418588"/>
+            <a:ext cx="10911535" cy="365760"/>
           </a:xfrm>
           <a:prstGeom prst="rect">
             <a:avLst/>
@@ -3712,7 +3642,7 @@
             <a:r>
               <a:rPr sz="2400" b="0" i="1">
                 <a:solidFill>
-                  <a:srgbClr val="B4B4B4"/>
+                  <a:srgbClr val="AAAAAA"/>
                 </a:solidFill>
                 <a:latin typeface="Arial"/>
               </a:rPr>
@@ -3729,8 +3659,78 @@
         </p:nvSpPr>
         <p:spPr>
           <a:xfrm>
-            <a:off x="594360" y="2980944"/>
-            <a:ext cx="11002975" cy="347472"/>
+            <a:off x="640080" y="2985516"/>
+            <a:ext cx="10911535" cy="731520"/>
+          </a:xfrm>
+          <a:prstGeom prst="rect">
+            <a:avLst/>
+          </a:prstGeom>
+          <a:noFill/>
+        </p:spPr>
+        <p:txBody>
+          <a:bodyPr wrap="square">
+            <a:spAutoFit/>
+          </a:bodyPr>
+          <a:lstStyle/>
+          <a:p>
+            <a:pPr algn="ctr"/>
+            <a:r>
+              <a:rPr sz="4800" b="1" i="0">
+                <a:solidFill>
+                  <a:srgbClr val="FFFFFF"/>
+                </a:solidFill>
+                <a:latin typeface="Arial"/>
+              </a:rPr>
+              <a:t>そのわざも 聖  -  い</a:t>
+            </a:r>
+          </a:p>
+        </p:txBody>
+      </p:sp>
+      <p:sp>
+        <p:nvSpPr>
+          <p:cNvPr id="5" name="TextBox 4"/>
+          <p:cNvSpPr txBox="1"/>
+          <p:nvPr/>
+        </p:nvSpPr>
+        <p:spPr>
+          <a:xfrm>
+            <a:off x="640080" y="3753612"/>
+            <a:ext cx="10911535" cy="365760"/>
+          </a:xfrm>
+          <a:prstGeom prst="rect">
+            <a:avLst/>
+          </a:prstGeom>
+          <a:noFill/>
+        </p:spPr>
+        <p:txBody>
+          <a:bodyPr wrap="square">
+            <a:spAutoFit/>
+          </a:bodyPr>
+          <a:lstStyle/>
+          <a:p>
+            <a:pPr algn="ctr"/>
+            <a:r>
+              <a:rPr sz="2400" b="0" i="1">
+                <a:solidFill>
+                  <a:srgbClr val="AAAAAA"/>
+                </a:solidFill>
+                <a:latin typeface="Arial"/>
+              </a:rPr>
+              <a:t>sono waza mo kiyoi</a:t>
+            </a:r>
+          </a:p>
+        </p:txBody>
+      </p:sp>
+      <p:sp>
+        <p:nvSpPr>
+          <p:cNvPr id="6" name="TextBox 5"/>
+          <p:cNvSpPr txBox="1"/>
+          <p:nvPr/>
+        </p:nvSpPr>
+        <p:spPr>
+          <a:xfrm>
+            <a:off x="640080" y="4530852"/>
+            <a:ext cx="10911535" cy="310896"/>
           </a:xfrm>
           <a:prstGeom prst="rect">
             <a:avLst/>
@@ -3747,7 +3747,7 @@
             <a:r>
               <a:rPr sz="2000" b="0" i="1">
                 <a:solidFill>
-                  <a:srgbClr val="8C8C8C"/>
+                  <a:srgbClr val="828282"/>
                 </a:solidFill>
                 <a:latin typeface="Arial"/>
               </a:rPr>
@@ -3758,84 +3758,14 @@
       </p:sp>
       <p:sp>
         <p:nvSpPr>
-          <p:cNvPr id="5" name="TextBox 4"/>
-          <p:cNvSpPr txBox="1"/>
-          <p:nvPr/>
-        </p:nvSpPr>
-        <p:spPr>
-          <a:xfrm>
-            <a:off x="594360" y="3529584"/>
-            <a:ext cx="11002975" cy="685800"/>
-          </a:xfrm>
-          <a:prstGeom prst="rect">
-            <a:avLst/>
-          </a:prstGeom>
-          <a:noFill/>
-        </p:spPr>
-        <p:txBody>
-          <a:bodyPr wrap="square">
-            <a:spAutoFit/>
-          </a:bodyPr>
-          <a:lstStyle/>
-          <a:p>
-            <a:pPr algn="ctr"/>
-            <a:r>
-              <a:rPr sz="4400" b="1" i="0">
-                <a:solidFill>
-                  <a:srgbClr val="FFFFFF"/>
-                </a:solidFill>
-                <a:latin typeface="Arial"/>
-              </a:rPr>
-              <a:t>そのわざも 聖  -  い</a:t>
-            </a:r>
-          </a:p>
-        </p:txBody>
-      </p:sp>
-      <p:sp>
-        <p:nvSpPr>
-          <p:cNvPr id="6" name="TextBox 5"/>
-          <p:cNvSpPr txBox="1"/>
-          <p:nvPr/>
-        </p:nvSpPr>
-        <p:spPr>
-          <a:xfrm>
-            <a:off x="594360" y="4251960"/>
-            <a:ext cx="11002975" cy="384048"/>
-          </a:xfrm>
-          <a:prstGeom prst="rect">
-            <a:avLst/>
-          </a:prstGeom>
-          <a:noFill/>
-        </p:spPr>
-        <p:txBody>
-          <a:bodyPr wrap="square">
-            <a:spAutoFit/>
-          </a:bodyPr>
-          <a:lstStyle/>
-          <a:p>
-            <a:pPr algn="ctr"/>
-            <a:r>
-              <a:rPr sz="2400" b="0" i="1">
-                <a:solidFill>
-                  <a:srgbClr val="B4B4B4"/>
-                </a:solidFill>
-                <a:latin typeface="Arial"/>
-              </a:rPr>
-              <a:t>sono waza mo kiyoi</a:t>
-            </a:r>
-          </a:p>
-        </p:txBody>
-      </p:sp>
-      <p:sp>
-        <p:nvSpPr>
           <p:cNvPr id="7" name="TextBox 6"/>
           <p:cNvSpPr txBox="1"/>
           <p:nvPr/>
         </p:nvSpPr>
         <p:spPr>
           <a:xfrm>
-            <a:off x="594360" y="4672584"/>
-            <a:ext cx="11002975" cy="347472"/>
+            <a:off x="640080" y="4896612"/>
+            <a:ext cx="10911535" cy="310896"/>
           </a:xfrm>
           <a:prstGeom prst="rect">
             <a:avLst/>
@@ -3852,7 +3782,7 @@
             <a:r>
               <a:rPr sz="2000" b="0" i="1">
                 <a:solidFill>
-                  <a:srgbClr val="8C8C8C"/>
+                  <a:srgbClr val="828282"/>
                 </a:solidFill>
                 <a:latin typeface="Arial"/>
               </a:rPr>
@@ -3895,23 +3825,23 @@
         </p:nvSpPr>
         <p:spPr>
           <a:xfrm>
-            <a:off x="594360" y="1837944"/>
-            <a:ext cx="11002975" cy="685800"/>
-          </a:xfrm>
-          <a:prstGeom prst="rect">
-            <a:avLst/>
-          </a:prstGeom>
-          <a:noFill/>
-        </p:spPr>
-        <p:txBody>
-          <a:bodyPr wrap="square">
-            <a:spAutoFit/>
-          </a:bodyPr>
-          <a:lstStyle/>
-          <a:p>
-            <a:pPr algn="ctr"/>
-            <a:r>
-              <a:rPr sz="4400" b="1" i="0">
+            <a:off x="640080" y="1650492"/>
+            <a:ext cx="10911535" cy="731520"/>
+          </a:xfrm>
+          <a:prstGeom prst="rect">
+            <a:avLst/>
+          </a:prstGeom>
+          <a:noFill/>
+        </p:spPr>
+        <p:txBody>
+          <a:bodyPr wrap="square">
+            <a:spAutoFit/>
+          </a:bodyPr>
+          <a:lstStyle/>
+          <a:p>
+            <a:pPr algn="ctr"/>
+            <a:r>
+              <a:rPr sz="4800" b="1" i="0">
                 <a:solidFill>
                   <a:srgbClr val="FFFFFF"/>
                 </a:solidFill>
@@ -3930,8 +3860,8 @@
         </p:nvSpPr>
         <p:spPr>
           <a:xfrm>
-            <a:off x="594360" y="2560320"/>
-            <a:ext cx="11002975" cy="384048"/>
+            <a:off x="640080" y="2418588"/>
+            <a:ext cx="10911535" cy="365760"/>
           </a:xfrm>
           <a:prstGeom prst="rect">
             <a:avLst/>
@@ -3948,7 +3878,7 @@
             <a:r>
               <a:rPr sz="2400" b="0" i="1">
                 <a:solidFill>
-                  <a:srgbClr val="B4B4B4"/>
+                  <a:srgbClr val="AAAAAA"/>
                 </a:solidFill>
                 <a:latin typeface="Arial"/>
               </a:rPr>
@@ -3965,8 +3895,78 @@
         </p:nvSpPr>
         <p:spPr>
           <a:xfrm>
-            <a:off x="594360" y="2980944"/>
-            <a:ext cx="11002975" cy="347472"/>
+            <a:off x="640080" y="2985516"/>
+            <a:ext cx="10911535" cy="731520"/>
+          </a:xfrm>
+          <a:prstGeom prst="rect">
+            <a:avLst/>
+          </a:prstGeom>
+          <a:noFill/>
+        </p:spPr>
+        <p:txBody>
+          <a:bodyPr wrap="square">
+            <a:spAutoFit/>
+          </a:bodyPr>
+          <a:lstStyle/>
+          <a:p>
+            <a:pPr algn="ctr"/>
+            <a:r>
+              <a:rPr sz="4800" b="1" i="0">
+                <a:solidFill>
+                  <a:srgbClr val="FFFFFF"/>
+                </a:solidFill>
+                <a:latin typeface="Arial"/>
+              </a:rPr>
+              <a:t>聖い方</a:t>
+            </a:r>
+          </a:p>
+        </p:txBody>
+      </p:sp>
+      <p:sp>
+        <p:nvSpPr>
+          <p:cNvPr id="5" name="TextBox 4"/>
+          <p:cNvSpPr txBox="1"/>
+          <p:nvPr/>
+        </p:nvSpPr>
+        <p:spPr>
+          <a:xfrm>
+            <a:off x="640080" y="3753612"/>
+            <a:ext cx="10911535" cy="365760"/>
+          </a:xfrm>
+          <a:prstGeom prst="rect">
+            <a:avLst/>
+          </a:prstGeom>
+          <a:noFill/>
+        </p:spPr>
+        <p:txBody>
+          <a:bodyPr wrap="square">
+            <a:spAutoFit/>
+          </a:bodyPr>
+          <a:lstStyle/>
+          <a:p>
+            <a:pPr algn="ctr"/>
+            <a:r>
+              <a:rPr sz="2400" b="0" i="1">
+                <a:solidFill>
+                  <a:srgbClr val="AAAAAA"/>
+                </a:solidFill>
+                <a:latin typeface="Arial"/>
+              </a:rPr>
+              <a:t>kiyoi kata</a:t>
+            </a:r>
+          </a:p>
+        </p:txBody>
+      </p:sp>
+      <p:sp>
+        <p:nvSpPr>
+          <p:cNvPr id="6" name="TextBox 5"/>
+          <p:cNvSpPr txBox="1"/>
+          <p:nvPr/>
+        </p:nvSpPr>
+        <p:spPr>
+          <a:xfrm>
+            <a:off x="640080" y="4530852"/>
+            <a:ext cx="10911535" cy="310896"/>
           </a:xfrm>
           <a:prstGeom prst="rect">
             <a:avLst/>
@@ -3983,7 +3983,7 @@
             <a:r>
               <a:rPr sz="2000" b="0" i="1">
                 <a:solidFill>
-                  <a:srgbClr val="8C8C8C"/>
+                  <a:srgbClr val="828282"/>
                 </a:solidFill>
                 <a:latin typeface="Arial"/>
               </a:rPr>
@@ -3994,84 +3994,14 @@
       </p:sp>
       <p:sp>
         <p:nvSpPr>
-          <p:cNvPr id="5" name="TextBox 4"/>
-          <p:cNvSpPr txBox="1"/>
-          <p:nvPr/>
-        </p:nvSpPr>
-        <p:spPr>
-          <a:xfrm>
-            <a:off x="594360" y="3529584"/>
-            <a:ext cx="11002975" cy="685800"/>
-          </a:xfrm>
-          <a:prstGeom prst="rect">
-            <a:avLst/>
-          </a:prstGeom>
-          <a:noFill/>
-        </p:spPr>
-        <p:txBody>
-          <a:bodyPr wrap="square">
-            <a:spAutoFit/>
-          </a:bodyPr>
-          <a:lstStyle/>
-          <a:p>
-            <a:pPr algn="ctr"/>
-            <a:r>
-              <a:rPr sz="4400" b="1" i="0">
-                <a:solidFill>
-                  <a:srgbClr val="FFFFFF"/>
-                </a:solidFill>
-                <a:latin typeface="Arial"/>
-              </a:rPr>
-              <a:t>聖い方</a:t>
-            </a:r>
-          </a:p>
-        </p:txBody>
-      </p:sp>
-      <p:sp>
-        <p:nvSpPr>
-          <p:cNvPr id="6" name="TextBox 5"/>
-          <p:cNvSpPr txBox="1"/>
-          <p:nvPr/>
-        </p:nvSpPr>
-        <p:spPr>
-          <a:xfrm>
-            <a:off x="594360" y="4251960"/>
-            <a:ext cx="11002975" cy="384048"/>
-          </a:xfrm>
-          <a:prstGeom prst="rect">
-            <a:avLst/>
-          </a:prstGeom>
-          <a:noFill/>
-        </p:spPr>
-        <p:txBody>
-          <a:bodyPr wrap="square">
-            <a:spAutoFit/>
-          </a:bodyPr>
-          <a:lstStyle/>
-          <a:p>
-            <a:pPr algn="ctr"/>
-            <a:r>
-              <a:rPr sz="2400" b="0" i="1">
-                <a:solidFill>
-                  <a:srgbClr val="B4B4B4"/>
-                </a:solidFill>
-                <a:latin typeface="Arial"/>
-              </a:rPr>
-              <a:t>kiyoi kata</a:t>
-            </a:r>
-          </a:p>
-        </p:txBody>
-      </p:sp>
-      <p:sp>
-        <p:nvSpPr>
           <p:cNvPr id="7" name="TextBox 6"/>
           <p:cNvSpPr txBox="1"/>
           <p:nvPr/>
         </p:nvSpPr>
         <p:spPr>
           <a:xfrm>
-            <a:off x="594360" y="4672584"/>
-            <a:ext cx="11002975" cy="347472"/>
+            <a:off x="640080" y="4896612"/>
+            <a:ext cx="10911535" cy="310896"/>
           </a:xfrm>
           <a:prstGeom prst="rect">
             <a:avLst/>
@@ -4088,7 +4018,7 @@
             <a:r>
               <a:rPr sz="2000" b="0" i="1">
                 <a:solidFill>
-                  <a:srgbClr val="8C8C8C"/>
+                  <a:srgbClr val="828282"/>
                 </a:solidFill>
                 <a:latin typeface="Arial"/>
               </a:rPr>
@@ -4131,23 +4061,23 @@
         </p:nvSpPr>
         <p:spPr>
           <a:xfrm>
-            <a:off x="594360" y="1837944"/>
-            <a:ext cx="11002975" cy="685800"/>
-          </a:xfrm>
-          <a:prstGeom prst="rect">
-            <a:avLst/>
-          </a:prstGeom>
-          <a:noFill/>
-        </p:spPr>
-        <p:txBody>
-          <a:bodyPr wrap="square">
-            <a:spAutoFit/>
-          </a:bodyPr>
-          <a:lstStyle/>
-          <a:p>
-            <a:pPr algn="ctr"/>
-            <a:r>
-              <a:rPr sz="4400" b="1" i="0">
+            <a:off x="640080" y="1650492"/>
+            <a:ext cx="10911535" cy="731520"/>
+          </a:xfrm>
+          <a:prstGeom prst="rect">
+            <a:avLst/>
+          </a:prstGeom>
+          <a:noFill/>
+        </p:spPr>
+        <p:txBody>
+          <a:bodyPr wrap="square">
+            <a:spAutoFit/>
+          </a:bodyPr>
+          <a:lstStyle/>
+          <a:p>
+            <a:pPr algn="ctr"/>
+            <a:r>
+              <a:rPr sz="4800" b="1" i="0">
                 <a:solidFill>
                   <a:srgbClr val="FFFFFF"/>
                 </a:solidFill>
@@ -4166,8 +4096,8 @@
         </p:nvSpPr>
         <p:spPr>
           <a:xfrm>
-            <a:off x="594360" y="2560320"/>
-            <a:ext cx="11002975" cy="384048"/>
+            <a:off x="640080" y="2418588"/>
+            <a:ext cx="10911535" cy="365760"/>
           </a:xfrm>
           <a:prstGeom prst="rect">
             <a:avLst/>
@@ -4184,7 +4114,7 @@
             <a:r>
               <a:rPr sz="2400" b="0" i="1">
                 <a:solidFill>
-                  <a:srgbClr val="B4B4B4"/>
+                  <a:srgbClr val="AAAAAA"/>
                 </a:solidFill>
                 <a:latin typeface="Arial"/>
               </a:rPr>
@@ -4201,8 +4131,78 @@
         </p:nvSpPr>
         <p:spPr>
           <a:xfrm>
-            <a:off x="594360" y="2980944"/>
-            <a:ext cx="11002975" cy="347472"/>
+            <a:off x="640080" y="2985516"/>
+            <a:ext cx="10911535" cy="731520"/>
+          </a:xfrm>
+          <a:prstGeom prst="rect">
+            <a:avLst/>
+          </a:prstGeom>
+          <a:noFill/>
+        </p:spPr>
+        <p:txBody>
+          <a:bodyPr wrap="square">
+            <a:spAutoFit/>
+          </a:bodyPr>
+          <a:lstStyle/>
+          <a:p>
+            <a:pPr algn="ctr"/>
+            <a:r>
+              <a:rPr sz="4800" b="1" i="0">
+                <a:solidFill>
+                  <a:srgbClr val="FFFFFF"/>
+                </a:solidFill>
+                <a:latin typeface="Arial"/>
+              </a:rPr>
+              <a:t>真の王, イエス  -  に</a:t>
+            </a:r>
+          </a:p>
+        </p:txBody>
+      </p:sp>
+      <p:sp>
+        <p:nvSpPr>
+          <p:cNvPr id="5" name="TextBox 4"/>
+          <p:cNvSpPr txBox="1"/>
+          <p:nvPr/>
+        </p:nvSpPr>
+        <p:spPr>
+          <a:xfrm>
+            <a:off x="640080" y="3753612"/>
+            <a:ext cx="10911535" cy="365760"/>
+          </a:xfrm>
+          <a:prstGeom prst="rect">
+            <a:avLst/>
+          </a:prstGeom>
+          <a:noFill/>
+        </p:spPr>
+        <p:txBody>
+          <a:bodyPr wrap="square">
+            <a:spAutoFit/>
+          </a:bodyPr>
+          <a:lstStyle/>
+          <a:p>
+            <a:pPr algn="ctr"/>
+            <a:r>
+              <a:rPr sz="2400" b="0" i="1">
+                <a:solidFill>
+                  <a:srgbClr val="AAAAAA"/>
+                </a:solidFill>
+                <a:latin typeface="Arial"/>
+              </a:rPr>
+              <a:t>makoto no ou issu ni</a:t>
+            </a:r>
+          </a:p>
+        </p:txBody>
+      </p:sp>
+      <p:sp>
+        <p:nvSpPr>
+          <p:cNvPr id="6" name="TextBox 5"/>
+          <p:cNvSpPr txBox="1"/>
+          <p:nvPr/>
+        </p:nvSpPr>
+        <p:spPr>
+          <a:xfrm>
+            <a:off x="640080" y="4530852"/>
+            <a:ext cx="10911535" cy="310896"/>
           </a:xfrm>
           <a:prstGeom prst="rect">
             <a:avLst/>
@@ -4219,7 +4219,7 @@
             <a:r>
               <a:rPr sz="2000" b="0" i="1">
                 <a:solidFill>
-                  <a:srgbClr val="8C8C8C"/>
+                  <a:srgbClr val="828282"/>
                 </a:solidFill>
                 <a:latin typeface="Arial"/>
               </a:rPr>
@@ -4230,84 +4230,14 @@
       </p:sp>
       <p:sp>
         <p:nvSpPr>
-          <p:cNvPr id="5" name="TextBox 4"/>
-          <p:cNvSpPr txBox="1"/>
-          <p:nvPr/>
-        </p:nvSpPr>
-        <p:spPr>
-          <a:xfrm>
-            <a:off x="594360" y="3529584"/>
-            <a:ext cx="11002975" cy="685800"/>
-          </a:xfrm>
-          <a:prstGeom prst="rect">
-            <a:avLst/>
-          </a:prstGeom>
-          <a:noFill/>
-        </p:spPr>
-        <p:txBody>
-          <a:bodyPr wrap="square">
-            <a:spAutoFit/>
-          </a:bodyPr>
-          <a:lstStyle/>
-          <a:p>
-            <a:pPr algn="ctr"/>
-            <a:r>
-              <a:rPr sz="4400" b="1" i="0">
-                <a:solidFill>
-                  <a:srgbClr val="FFFFFF"/>
-                </a:solidFill>
-                <a:latin typeface="Arial"/>
-              </a:rPr>
-              <a:t>真の王, イエス  -  に</a:t>
-            </a:r>
-          </a:p>
-        </p:txBody>
-      </p:sp>
-      <p:sp>
-        <p:nvSpPr>
-          <p:cNvPr id="6" name="TextBox 5"/>
-          <p:cNvSpPr txBox="1"/>
-          <p:nvPr/>
-        </p:nvSpPr>
-        <p:spPr>
-          <a:xfrm>
-            <a:off x="594360" y="4251960"/>
-            <a:ext cx="11002975" cy="384048"/>
-          </a:xfrm>
-          <a:prstGeom prst="rect">
-            <a:avLst/>
-          </a:prstGeom>
-          <a:noFill/>
-        </p:spPr>
-        <p:txBody>
-          <a:bodyPr wrap="square">
-            <a:spAutoFit/>
-          </a:bodyPr>
-          <a:lstStyle/>
-          <a:p>
-            <a:pPr algn="ctr"/>
-            <a:r>
-              <a:rPr sz="2400" b="0" i="1">
-                <a:solidFill>
-                  <a:srgbClr val="B4B4B4"/>
-                </a:solidFill>
-                <a:latin typeface="Arial"/>
-              </a:rPr>
-              <a:t>makoto no ou issu ni</a:t>
-            </a:r>
-          </a:p>
-        </p:txBody>
-      </p:sp>
-      <p:sp>
-        <p:nvSpPr>
           <p:cNvPr id="7" name="TextBox 6"/>
           <p:cNvSpPr txBox="1"/>
           <p:nvPr/>
         </p:nvSpPr>
         <p:spPr>
           <a:xfrm>
-            <a:off x="594360" y="4672584"/>
-            <a:ext cx="11002975" cy="347472"/>
+            <a:off x="640080" y="4896612"/>
+            <a:ext cx="10911535" cy="310896"/>
           </a:xfrm>
           <a:prstGeom prst="rect">
             <a:avLst/>
@@ -4324,7 +4254,7 @@
             <a:r>
               <a:rPr sz="2000" b="0" i="1">
                 <a:solidFill>
-                  <a:srgbClr val="8C8C8C"/>
+                  <a:srgbClr val="828282"/>
                 </a:solidFill>
                 <a:latin typeface="Arial"/>
               </a:rPr>
@@ -4367,23 +4297,23 @@
         </p:nvSpPr>
         <p:spPr>
           <a:xfrm>
-            <a:off x="594360" y="1837944"/>
-            <a:ext cx="11002975" cy="685800"/>
-          </a:xfrm>
-          <a:prstGeom prst="rect">
-            <a:avLst/>
-          </a:prstGeom>
-          <a:noFill/>
-        </p:spPr>
-        <p:txBody>
-          <a:bodyPr wrap="square">
-            <a:spAutoFit/>
-          </a:bodyPr>
-          <a:lstStyle/>
-          <a:p>
-            <a:pPr algn="ctr"/>
-            <a:r>
-              <a:rPr sz="4400" b="1" i="0">
+            <a:off x="640080" y="1650492"/>
+            <a:ext cx="10911535" cy="731520"/>
+          </a:xfrm>
+          <a:prstGeom prst="rect">
+            <a:avLst/>
+          </a:prstGeom>
+          <a:noFill/>
+        </p:spPr>
+        <p:txBody>
+          <a:bodyPr wrap="square">
+            <a:spAutoFit/>
+          </a:bodyPr>
+          <a:lstStyle/>
+          <a:p>
+            <a:pPr algn="ctr"/>
+            <a:r>
+              <a:rPr sz="4800" b="1" i="0">
                 <a:solidFill>
                   <a:srgbClr val="FFFFFF"/>
                 </a:solidFill>
@@ -4402,8 +4332,8 @@
         </p:nvSpPr>
         <p:spPr>
           <a:xfrm>
-            <a:off x="594360" y="2560320"/>
-            <a:ext cx="11002975" cy="384048"/>
+            <a:off x="640080" y="2418588"/>
+            <a:ext cx="10911535" cy="365760"/>
           </a:xfrm>
           <a:prstGeom prst="rect">
             <a:avLst/>
@@ -4420,7 +4350,7 @@
             <a:r>
               <a:rPr sz="2400" b="0" i="1">
                 <a:solidFill>
-                  <a:srgbClr val="B4B4B4"/>
+                  <a:srgbClr val="AAAAAA"/>
                 </a:solidFill>
                 <a:latin typeface="Arial"/>
               </a:rPr>
@@ -4437,8 +4367,78 @@
         </p:nvSpPr>
         <p:spPr>
           <a:xfrm>
-            <a:off x="594360" y="2980944"/>
-            <a:ext cx="11002975" cy="347472"/>
+            <a:off x="640080" y="2985516"/>
+            <a:ext cx="10911535" cy="731520"/>
+          </a:xfrm>
+          <a:prstGeom prst="rect">
+            <a:avLst/>
+          </a:prstGeom>
+          <a:noFill/>
+        </p:spPr>
+        <p:txBody>
+          <a:bodyPr wrap="square">
+            <a:spAutoFit/>
+          </a:bodyPr>
+          <a:lstStyle/>
+          <a:p>
+            <a:pPr algn="ctr"/>
+            <a:r>
+              <a:rPr sz="4800" b="1" i="0">
+                <a:solidFill>
+                  <a:srgbClr val="FFFFFF"/>
+                </a:solidFill>
+                <a:latin typeface="Arial"/>
+              </a:rPr>
+              <a:t>聖い方</a:t>
+            </a:r>
+          </a:p>
+        </p:txBody>
+      </p:sp>
+      <p:sp>
+        <p:nvSpPr>
+          <p:cNvPr id="5" name="TextBox 4"/>
+          <p:cNvSpPr txBox="1"/>
+          <p:nvPr/>
+        </p:nvSpPr>
+        <p:spPr>
+          <a:xfrm>
+            <a:off x="640080" y="3753612"/>
+            <a:ext cx="10911535" cy="365760"/>
+          </a:xfrm>
+          <a:prstGeom prst="rect">
+            <a:avLst/>
+          </a:prstGeom>
+          <a:noFill/>
+        </p:spPr>
+        <p:txBody>
+          <a:bodyPr wrap="square">
+            <a:spAutoFit/>
+          </a:bodyPr>
+          <a:lstStyle/>
+          <a:p>
+            <a:pPr algn="ctr"/>
+            <a:r>
+              <a:rPr sz="2400" b="0" i="1">
+                <a:solidFill>
+                  <a:srgbClr val="AAAAAA"/>
+                </a:solidFill>
+                <a:latin typeface="Arial"/>
+              </a:rPr>
+              <a:t>kiyoi kata</a:t>
+            </a:r>
+          </a:p>
+        </p:txBody>
+      </p:sp>
+      <p:sp>
+        <p:nvSpPr>
+          <p:cNvPr id="6" name="TextBox 5"/>
+          <p:cNvSpPr txBox="1"/>
+          <p:nvPr/>
+        </p:nvSpPr>
+        <p:spPr>
+          <a:xfrm>
+            <a:off x="640080" y="4530852"/>
+            <a:ext cx="10911535" cy="310896"/>
           </a:xfrm>
           <a:prstGeom prst="rect">
             <a:avLst/>
@@ -4455,7 +4455,7 @@
             <a:r>
               <a:rPr sz="2000" b="0" i="1">
                 <a:solidFill>
-                  <a:srgbClr val="8C8C8C"/>
+                  <a:srgbClr val="828282"/>
                 </a:solidFill>
                 <a:latin typeface="Arial"/>
               </a:rPr>
@@ -4466,84 +4466,14 @@
       </p:sp>
       <p:sp>
         <p:nvSpPr>
-          <p:cNvPr id="5" name="TextBox 4"/>
-          <p:cNvSpPr txBox="1"/>
-          <p:nvPr/>
-        </p:nvSpPr>
-        <p:spPr>
-          <a:xfrm>
-            <a:off x="594360" y="3529584"/>
-            <a:ext cx="11002975" cy="685800"/>
-          </a:xfrm>
-          <a:prstGeom prst="rect">
-            <a:avLst/>
-          </a:prstGeom>
-          <a:noFill/>
-        </p:spPr>
-        <p:txBody>
-          <a:bodyPr wrap="square">
-            <a:spAutoFit/>
-          </a:bodyPr>
-          <a:lstStyle/>
-          <a:p>
-            <a:pPr algn="ctr"/>
-            <a:r>
-              <a:rPr sz="4400" b="1" i="0">
-                <a:solidFill>
-                  <a:srgbClr val="FFFFFF"/>
-                </a:solidFill>
-                <a:latin typeface="Arial"/>
-              </a:rPr>
-              <a:t>聖い方</a:t>
-            </a:r>
-          </a:p>
-        </p:txBody>
-      </p:sp>
-      <p:sp>
-        <p:nvSpPr>
-          <p:cNvPr id="6" name="TextBox 5"/>
-          <p:cNvSpPr txBox="1"/>
-          <p:nvPr/>
-        </p:nvSpPr>
-        <p:spPr>
-          <a:xfrm>
-            <a:off x="594360" y="4251960"/>
-            <a:ext cx="11002975" cy="384048"/>
-          </a:xfrm>
-          <a:prstGeom prst="rect">
-            <a:avLst/>
-          </a:prstGeom>
-          <a:noFill/>
-        </p:spPr>
-        <p:txBody>
-          <a:bodyPr wrap="square">
-            <a:spAutoFit/>
-          </a:bodyPr>
-          <a:lstStyle/>
-          <a:p>
-            <a:pPr algn="ctr"/>
-            <a:r>
-              <a:rPr sz="2400" b="0" i="1">
-                <a:solidFill>
-                  <a:srgbClr val="B4B4B4"/>
-                </a:solidFill>
-                <a:latin typeface="Arial"/>
-              </a:rPr>
-              <a:t>kiyoi kata</a:t>
-            </a:r>
-          </a:p>
-        </p:txBody>
-      </p:sp>
-      <p:sp>
-        <p:nvSpPr>
           <p:cNvPr id="7" name="TextBox 6"/>
           <p:cNvSpPr txBox="1"/>
           <p:nvPr/>
         </p:nvSpPr>
         <p:spPr>
           <a:xfrm>
-            <a:off x="594360" y="4672584"/>
-            <a:ext cx="11002975" cy="347472"/>
+            <a:off x="640080" y="4896612"/>
+            <a:ext cx="10911535" cy="310896"/>
           </a:xfrm>
           <a:prstGeom prst="rect">
             <a:avLst/>
@@ -4560,7 +4490,7 @@
             <a:r>
               <a:rPr sz="2000" b="0" i="1">
                 <a:solidFill>
-                  <a:srgbClr val="8C8C8C"/>
+                  <a:srgbClr val="828282"/>
                 </a:solidFill>
                 <a:latin typeface="Arial"/>
               </a:rPr>
@@ -4603,23 +4533,23 @@
         </p:nvSpPr>
         <p:spPr>
           <a:xfrm>
-            <a:off x="594360" y="2258568"/>
-            <a:ext cx="11002975" cy="685800"/>
-          </a:xfrm>
-          <a:prstGeom prst="rect">
-            <a:avLst/>
-          </a:prstGeom>
-          <a:noFill/>
-        </p:spPr>
-        <p:txBody>
-          <a:bodyPr wrap="square">
-            <a:spAutoFit/>
-          </a:bodyPr>
-          <a:lstStyle/>
-          <a:p>
-            <a:pPr algn="ctr"/>
-            <a:r>
-              <a:rPr sz="4400" b="1" i="0">
+            <a:off x="640080" y="2052828"/>
+            <a:ext cx="10911535" cy="731520"/>
+          </a:xfrm>
+          <a:prstGeom prst="rect">
+            <a:avLst/>
+          </a:prstGeom>
+          <a:noFill/>
+        </p:spPr>
+        <p:txBody>
+          <a:bodyPr wrap="square">
+            <a:spAutoFit/>
+          </a:bodyPr>
+          <a:lstStyle/>
+          <a:p>
+            <a:pPr algn="ctr"/>
+            <a:r>
+              <a:rPr sz="4800" b="1" i="0">
                 <a:solidFill>
                   <a:srgbClr val="FFFFFF"/>
                 </a:solidFill>
@@ -4638,99 +4568,29 @@
         </p:nvSpPr>
         <p:spPr>
           <a:xfrm>
-            <a:off x="594360" y="2980944"/>
-            <a:ext cx="11002975" cy="347472"/>
-          </a:xfrm>
-          <a:prstGeom prst="rect">
-            <a:avLst/>
-          </a:prstGeom>
-          <a:noFill/>
-        </p:spPr>
-        <p:txBody>
-          <a:bodyPr wrap="square">
-            <a:spAutoFit/>
-          </a:bodyPr>
-          <a:lstStyle/>
-          <a:p>
-            <a:pPr algn="ctr"/>
-            <a:r>
-              <a:rPr sz="2200" b="0" i="1">
-                <a:solidFill>
-                  <a:srgbClr val="8C8C8C"/>
-                </a:solidFill>
-                <a:latin typeface="Arial"/>
-              </a:rPr>
-              <a:t/>
-            </a:r>
-          </a:p>
-        </p:txBody>
-      </p:sp>
-      <p:sp>
-        <p:nvSpPr>
-          <p:cNvPr id="4" name="TextBox 3"/>
-          <p:cNvSpPr txBox="1"/>
-          <p:nvPr/>
-        </p:nvSpPr>
-        <p:spPr>
-          <a:xfrm>
-            <a:off x="594360" y="3529584"/>
-            <a:ext cx="11002975" cy="685800"/>
-          </a:xfrm>
-          <a:prstGeom prst="rect">
-            <a:avLst/>
-          </a:prstGeom>
-          <a:noFill/>
-        </p:spPr>
-        <p:txBody>
-          <a:bodyPr wrap="square">
-            <a:spAutoFit/>
-          </a:bodyPr>
-          <a:lstStyle/>
-          <a:p>
-            <a:pPr algn="ctr"/>
-            <a:r>
-              <a:rPr sz="4400" b="1" i="0">
+            <a:off x="640080" y="2985516"/>
+            <a:ext cx="10911535" cy="731520"/>
+          </a:xfrm>
+          <a:prstGeom prst="rect">
+            <a:avLst/>
+          </a:prstGeom>
+          <a:noFill/>
+        </p:spPr>
+        <p:txBody>
+          <a:bodyPr wrap="square">
+            <a:spAutoFit/>
+          </a:bodyPr>
+          <a:lstStyle/>
+          <a:p>
+            <a:pPr algn="ctr"/>
+            <a:r>
+              <a:rPr sz="4800" b="1" i="0">
                 <a:solidFill>
                   <a:srgbClr val="FFFFFF"/>
                 </a:solidFill>
                 <a:latin typeface="Arial"/>
               </a:rPr>
               <a:t>Cante ao Cordeiro uma canção</a:t>
-            </a:r>
-          </a:p>
-        </p:txBody>
-      </p:sp>
-      <p:sp>
-        <p:nvSpPr>
-          <p:cNvPr id="5" name="TextBox 4"/>
-          <p:cNvSpPr txBox="1"/>
-          <p:nvPr/>
-        </p:nvSpPr>
-        <p:spPr>
-          <a:xfrm>
-            <a:off x="594360" y="4251960"/>
-            <a:ext cx="11002975" cy="347472"/>
-          </a:xfrm>
-          <a:prstGeom prst="rect">
-            <a:avLst/>
-          </a:prstGeom>
-          <a:noFill/>
-        </p:spPr>
-        <p:txBody>
-          <a:bodyPr wrap="square">
-            <a:spAutoFit/>
-          </a:bodyPr>
-          <a:lstStyle/>
-          <a:p>
-            <a:pPr algn="ctr"/>
-            <a:r>
-              <a:rPr sz="2200" b="0" i="1">
-                <a:solidFill>
-                  <a:srgbClr val="8C8C8C"/>
-                </a:solidFill>
-                <a:latin typeface="Arial"/>
-              </a:rPr>
-              <a:t/>
             </a:r>
           </a:p>
         </p:txBody>
@@ -4769,23 +4629,23 @@
         </p:nvSpPr>
         <p:spPr>
           <a:xfrm>
-            <a:off x="594360" y="2258568"/>
-            <a:ext cx="11002975" cy="685800"/>
-          </a:xfrm>
-          <a:prstGeom prst="rect">
-            <a:avLst/>
-          </a:prstGeom>
-          <a:noFill/>
-        </p:spPr>
-        <p:txBody>
-          <a:bodyPr wrap="square">
-            <a:spAutoFit/>
-          </a:bodyPr>
-          <a:lstStyle/>
-          <a:p>
-            <a:pPr algn="ctr"/>
-            <a:r>
-              <a:rPr sz="4400" b="1" i="0">
+            <a:off x="640080" y="2052828"/>
+            <a:ext cx="10911535" cy="731520"/>
+          </a:xfrm>
+          <a:prstGeom prst="rect">
+            <a:avLst/>
+          </a:prstGeom>
+          <a:noFill/>
+        </p:spPr>
+        <p:txBody>
+          <a:bodyPr wrap="square">
+            <a:spAutoFit/>
+          </a:bodyPr>
+          <a:lstStyle/>
+          <a:p>
+            <a:pPr algn="ctr"/>
+            <a:r>
+              <a:rPr sz="4800" b="1" i="0">
                 <a:solidFill>
                   <a:srgbClr val="FFFFFF"/>
                 </a:solidFill>
@@ -4804,99 +4664,29 @@
         </p:nvSpPr>
         <p:spPr>
           <a:xfrm>
-            <a:off x="594360" y="2980944"/>
-            <a:ext cx="11002975" cy="347472"/>
-          </a:xfrm>
-          <a:prstGeom prst="rect">
-            <a:avLst/>
-          </a:prstGeom>
-          <a:noFill/>
-        </p:spPr>
-        <p:txBody>
-          <a:bodyPr wrap="square">
-            <a:spAutoFit/>
-          </a:bodyPr>
-          <a:lstStyle/>
-          <a:p>
-            <a:pPr algn="ctr"/>
-            <a:r>
-              <a:rPr sz="2200" b="0" i="1">
-                <a:solidFill>
-                  <a:srgbClr val="8C8C8C"/>
-                </a:solidFill>
-                <a:latin typeface="Arial"/>
-              </a:rPr>
-              <a:t/>
-            </a:r>
-          </a:p>
-        </p:txBody>
-      </p:sp>
-      <p:sp>
-        <p:nvSpPr>
-          <p:cNvPr id="4" name="TextBox 3"/>
-          <p:cNvSpPr txBox="1"/>
-          <p:nvPr/>
-        </p:nvSpPr>
-        <p:spPr>
-          <a:xfrm>
-            <a:off x="594360" y="3529584"/>
-            <a:ext cx="11002975" cy="685800"/>
-          </a:xfrm>
-          <a:prstGeom prst="rect">
-            <a:avLst/>
-          </a:prstGeom>
-          <a:noFill/>
-        </p:spPr>
-        <p:txBody>
-          <a:bodyPr wrap="square">
-            <a:spAutoFit/>
-          </a:bodyPr>
-          <a:lstStyle/>
-          <a:p>
-            <a:pPr algn="ctr"/>
-            <a:r>
-              <a:rPr sz="4400" b="1" i="0">
+            <a:off x="640080" y="2985516"/>
+            <a:ext cx="10911535" cy="731520"/>
+          </a:xfrm>
+          <a:prstGeom prst="rect">
+            <a:avLst/>
+          </a:prstGeom>
+          <a:noFill/>
+        </p:spPr>
+        <p:txBody>
+          <a:bodyPr wrap="square">
+            <a:spAutoFit/>
+          </a:bodyPr>
+          <a:lstStyle/>
+          <a:p>
+            <a:pPr algn="ctr"/>
+            <a:r>
+              <a:rPr sz="4800" b="1" i="0">
                 <a:solidFill>
                   <a:srgbClr val="FFFFFF"/>
                 </a:solidFill>
                 <a:latin typeface="Arial"/>
               </a:rPr>
               <a:t>E leva o Seu nome</a:t>
-            </a:r>
-          </a:p>
-        </p:txBody>
-      </p:sp>
-      <p:sp>
-        <p:nvSpPr>
-          <p:cNvPr id="5" name="TextBox 4"/>
-          <p:cNvSpPr txBox="1"/>
-          <p:nvPr/>
-        </p:nvSpPr>
-        <p:spPr>
-          <a:xfrm>
-            <a:off x="594360" y="4251960"/>
-            <a:ext cx="11002975" cy="347472"/>
-          </a:xfrm>
-          <a:prstGeom prst="rect">
-            <a:avLst/>
-          </a:prstGeom>
-          <a:noFill/>
-        </p:spPr>
-        <p:txBody>
-          <a:bodyPr wrap="square">
-            <a:spAutoFit/>
-          </a:bodyPr>
-          <a:lstStyle/>
-          <a:p>
-            <a:pPr algn="ctr"/>
-            <a:r>
-              <a:rPr sz="2200" b="0" i="1">
-                <a:solidFill>
-                  <a:srgbClr val="8C8C8C"/>
-                </a:solidFill>
-                <a:latin typeface="Arial"/>
-              </a:rPr>
-              <a:t/>
             </a:r>
           </a:p>
         </p:txBody>
@@ -4935,23 +4725,23 @@
         </p:nvSpPr>
         <p:spPr>
           <a:xfrm>
-            <a:off x="594360" y="2258568"/>
-            <a:ext cx="11002975" cy="685800"/>
-          </a:xfrm>
-          <a:prstGeom prst="rect">
-            <a:avLst/>
-          </a:prstGeom>
-          <a:noFill/>
-        </p:spPr>
-        <p:txBody>
-          <a:bodyPr wrap="square">
-            <a:spAutoFit/>
-          </a:bodyPr>
-          <a:lstStyle/>
-          <a:p>
-            <a:pPr algn="ctr"/>
-            <a:r>
-              <a:rPr sz="4400" b="1" i="0">
+            <a:off x="640080" y="2052828"/>
+            <a:ext cx="10911535" cy="731520"/>
+          </a:xfrm>
+          <a:prstGeom prst="rect">
+            <a:avLst/>
+          </a:prstGeom>
+          <a:noFill/>
+        </p:spPr>
+        <p:txBody>
+          <a:bodyPr wrap="square">
+            <a:spAutoFit/>
+          </a:bodyPr>
+          <a:lstStyle/>
+          <a:p>
+            <a:pPr algn="ctr"/>
+            <a:r>
+              <a:rPr sz="4800" b="1" i="0">
                 <a:solidFill>
                   <a:srgbClr val="FFFFFF"/>
                 </a:solidFill>
@@ -4970,99 +4760,29 @@
         </p:nvSpPr>
         <p:spPr>
           <a:xfrm>
-            <a:off x="594360" y="2980944"/>
-            <a:ext cx="11002975" cy="347472"/>
-          </a:xfrm>
-          <a:prstGeom prst="rect">
-            <a:avLst/>
-          </a:prstGeom>
-          <a:noFill/>
-        </p:spPr>
-        <p:txBody>
-          <a:bodyPr wrap="square">
-            <a:spAutoFit/>
-          </a:bodyPr>
-          <a:lstStyle/>
-          <a:p>
-            <a:pPr algn="ctr"/>
-            <a:r>
-              <a:rPr sz="2200" b="0" i="1">
-                <a:solidFill>
-                  <a:srgbClr val="8C8C8C"/>
-                </a:solidFill>
-                <a:latin typeface="Arial"/>
-              </a:rPr>
-              <a:t/>
-            </a:r>
-          </a:p>
-        </p:txBody>
-      </p:sp>
-      <p:sp>
-        <p:nvSpPr>
-          <p:cNvPr id="4" name="TextBox 3"/>
-          <p:cNvSpPr txBox="1"/>
-          <p:nvPr/>
-        </p:nvSpPr>
-        <p:spPr>
-          <a:xfrm>
-            <a:off x="594360" y="3529584"/>
-            <a:ext cx="11002975" cy="685800"/>
-          </a:xfrm>
-          <a:prstGeom prst="rect">
-            <a:avLst/>
-          </a:prstGeom>
-          <a:noFill/>
-        </p:spPr>
-        <p:txBody>
-          <a:bodyPr wrap="square">
-            <a:spAutoFit/>
-          </a:bodyPr>
-          <a:lstStyle/>
-          <a:p>
-            <a:pPr algn="ctr"/>
-            <a:r>
-              <a:rPr sz="4400" b="1" i="0">
+            <a:off x="640080" y="2985516"/>
+            <a:ext cx="10911535" cy="731520"/>
+          </a:xfrm>
+          <a:prstGeom prst="rect">
+            <a:avLst/>
+          </a:prstGeom>
+          <a:noFill/>
+        </p:spPr>
+        <p:txBody>
+          <a:bodyPr wrap="square">
+            <a:spAutoFit/>
+          </a:bodyPr>
+          <a:lstStyle/>
+          <a:p>
+            <a:pPr algn="ctr"/>
+            <a:r>
+              <a:rPr sz="4800" b="1" i="0">
                 <a:solidFill>
                   <a:srgbClr val="FFFFFF"/>
                 </a:solidFill>
                 <a:latin typeface="Arial"/>
               </a:rPr>
               <a:t>Cantaremos para sempre, amém</a:t>
-            </a:r>
-          </a:p>
-        </p:txBody>
-      </p:sp>
-      <p:sp>
-        <p:nvSpPr>
-          <p:cNvPr id="5" name="TextBox 4"/>
-          <p:cNvSpPr txBox="1"/>
-          <p:nvPr/>
-        </p:nvSpPr>
-        <p:spPr>
-          <a:xfrm>
-            <a:off x="594360" y="4251960"/>
-            <a:ext cx="11002975" cy="347472"/>
-          </a:xfrm>
-          <a:prstGeom prst="rect">
-            <a:avLst/>
-          </a:prstGeom>
-          <a:noFill/>
-        </p:spPr>
-        <p:txBody>
-          <a:bodyPr wrap="square">
-            <a:spAutoFit/>
-          </a:bodyPr>
-          <a:lstStyle/>
-          <a:p>
-            <a:pPr algn="ctr"/>
-            <a:r>
-              <a:rPr sz="2200" b="0" i="1">
-                <a:solidFill>
-                  <a:srgbClr val="8C8C8C"/>
-                </a:solidFill>
-                <a:latin typeface="Arial"/>
-              </a:rPr>
-              <a:t/>
             </a:r>
           </a:p>
         </p:txBody>
@@ -5101,23 +4821,23 @@
         </p:nvSpPr>
         <p:spPr>
           <a:xfrm>
-            <a:off x="594360" y="2258568"/>
-            <a:ext cx="11002975" cy="685800"/>
-          </a:xfrm>
-          <a:prstGeom prst="rect">
-            <a:avLst/>
-          </a:prstGeom>
-          <a:noFill/>
-        </p:spPr>
-        <p:txBody>
-          <a:bodyPr wrap="square">
-            <a:spAutoFit/>
-          </a:bodyPr>
-          <a:lstStyle/>
-          <a:p>
-            <a:pPr algn="ctr"/>
-            <a:r>
-              <a:rPr sz="4400" b="1" i="0">
+            <a:off x="640080" y="2052828"/>
+            <a:ext cx="10911535" cy="731520"/>
+          </a:xfrm>
+          <a:prstGeom prst="rect">
+            <a:avLst/>
+          </a:prstGeom>
+          <a:noFill/>
+        </p:spPr>
+        <p:txBody>
+          <a:bodyPr wrap="square">
+            <a:spAutoFit/>
+          </a:bodyPr>
+          <a:lstStyle/>
+          <a:p>
+            <a:pPr algn="ctr"/>
+            <a:r>
+              <a:rPr sz="4800" b="1" i="0">
                 <a:solidFill>
                   <a:srgbClr val="FFFFFF"/>
                 </a:solidFill>
@@ -5136,25 +4856,60 @@
         </p:nvSpPr>
         <p:spPr>
           <a:xfrm>
-            <a:off x="594360" y="2980944"/>
-            <a:ext cx="11002975" cy="347472"/>
-          </a:xfrm>
-          <a:prstGeom prst="rect">
-            <a:avLst/>
-          </a:prstGeom>
-          <a:noFill/>
-        </p:spPr>
-        <p:txBody>
-          <a:bodyPr wrap="square">
-            <a:spAutoFit/>
-          </a:bodyPr>
-          <a:lstStyle/>
-          <a:p>
-            <a:pPr algn="ctr"/>
-            <a:r>
-              <a:rPr sz="2200" b="0" i="1">
-                <a:solidFill>
-                  <a:srgbClr val="8C8C8C"/>
+            <a:off x="640080" y="2985516"/>
+            <a:ext cx="10911535" cy="731520"/>
+          </a:xfrm>
+          <a:prstGeom prst="rect">
+            <a:avLst/>
+          </a:prstGeom>
+          <a:noFill/>
+        </p:spPr>
+        <p:txBody>
+          <a:bodyPr wrap="square">
+            <a:spAutoFit/>
+          </a:bodyPr>
+          <a:lstStyle/>
+          <a:p>
+            <a:pPr algn="ctr"/>
+            <a:r>
+              <a:rPr sz="4800" b="1" i="0">
+                <a:solidFill>
+                  <a:srgbClr val="FFFFFF"/>
+                </a:solidFill>
+                <a:latin typeface="Arial"/>
+              </a:rPr>
+              <a:t>Toda criação, "Santo"</a:t>
+            </a:r>
+          </a:p>
+        </p:txBody>
+      </p:sp>
+      <p:sp>
+        <p:nvSpPr>
+          <p:cNvPr id="4" name="TextBox 3"/>
+          <p:cNvSpPr txBox="1"/>
+          <p:nvPr/>
+        </p:nvSpPr>
+        <p:spPr>
+          <a:xfrm>
+            <a:off x="640080" y="4128516"/>
+            <a:ext cx="10911535" cy="310896"/>
+          </a:xfrm>
+          <a:prstGeom prst="rect">
+            <a:avLst/>
+          </a:prstGeom>
+          <a:noFill/>
+        </p:spPr>
+        <p:txBody>
+          <a:bodyPr wrap="square">
+            <a:spAutoFit/>
+          </a:bodyPr>
+          <a:lstStyle/>
+          <a:p>
+            <a:pPr algn="ctr"/>
+            <a:r>
+              <a:rPr sz="2000" b="0" i="0">
+                <a:solidFill>
+                  <a:srgbClr val="828282"/>
                 </a:solidFill>
                 <a:latin typeface="Arial"/>
               </a:rPr>
@@ -5165,66 +4920,31 @@
       </p:sp>
       <p:sp>
         <p:nvSpPr>
-          <p:cNvPr id="4" name="TextBox 3"/>
-          <p:cNvSpPr txBox="1"/>
-          <p:nvPr/>
-        </p:nvSpPr>
-        <p:spPr>
-          <a:xfrm>
-            <a:off x="594360" y="3529584"/>
-            <a:ext cx="11002975" cy="685800"/>
-          </a:xfrm>
-          <a:prstGeom prst="rect">
-            <a:avLst/>
-          </a:prstGeom>
-          <a:noFill/>
-        </p:spPr>
-        <p:txBody>
-          <a:bodyPr wrap="square">
-            <a:spAutoFit/>
-          </a:bodyPr>
-          <a:lstStyle/>
-          <a:p>
-            <a:pPr algn="ctr"/>
-            <a:r>
-              <a:rPr sz="4400" b="1" i="0">
-                <a:solidFill>
-                  <a:srgbClr val="FFFFFF"/>
-                </a:solidFill>
-                <a:latin typeface="Arial"/>
-              </a:rPr>
-              <a:t>Toda criação, "Santo"</a:t>
-            </a:r>
-          </a:p>
-        </p:txBody>
-      </p:sp>
-      <p:sp>
-        <p:nvSpPr>
           <p:cNvPr id="5" name="TextBox 4"/>
           <p:cNvSpPr txBox="1"/>
           <p:nvPr/>
         </p:nvSpPr>
         <p:spPr>
           <a:xfrm>
-            <a:off x="594360" y="4251960"/>
-            <a:ext cx="11002975" cy="347472"/>
-          </a:xfrm>
-          <a:prstGeom prst="rect">
-            <a:avLst/>
-          </a:prstGeom>
-          <a:noFill/>
-        </p:spPr>
-        <p:txBody>
-          <a:bodyPr wrap="square">
-            <a:spAutoFit/>
-          </a:bodyPr>
-          <a:lstStyle/>
-          <a:p>
-            <a:pPr algn="ctr"/>
-            <a:r>
-              <a:rPr sz="2200" b="0" i="1">
-                <a:solidFill>
-                  <a:srgbClr val="8C8C8C"/>
+            <a:off x="640080" y="4494276"/>
+            <a:ext cx="10911535" cy="310896"/>
+          </a:xfrm>
+          <a:prstGeom prst="rect">
+            <a:avLst/>
+          </a:prstGeom>
+          <a:noFill/>
+        </p:spPr>
+        <p:txBody>
+          <a:bodyPr wrap="square">
+            <a:spAutoFit/>
+          </a:bodyPr>
+          <a:lstStyle/>
+          <a:p>
+            <a:pPr algn="ctr"/>
+            <a:r>
+              <a:rPr sz="2000" b="0" i="0">
+                <a:solidFill>
+                  <a:srgbClr val="828282"/>
                 </a:solidFill>
                 <a:latin typeface="Arial"/>
               </a:rPr>
@@ -5267,23 +4987,23 @@
         </p:nvSpPr>
         <p:spPr>
           <a:xfrm>
-            <a:off x="594360" y="2258568"/>
-            <a:ext cx="11002975" cy="685800"/>
-          </a:xfrm>
-          <a:prstGeom prst="rect">
-            <a:avLst/>
-          </a:prstGeom>
-          <a:noFill/>
-        </p:spPr>
-        <p:txBody>
-          <a:bodyPr wrap="square">
-            <a:spAutoFit/>
-          </a:bodyPr>
-          <a:lstStyle/>
-          <a:p>
-            <a:pPr algn="ctr"/>
-            <a:r>
-              <a:rPr sz="4400" b="1" i="0">
+            <a:off x="640080" y="2052828"/>
+            <a:ext cx="10911535" cy="731520"/>
+          </a:xfrm>
+          <a:prstGeom prst="rect">
+            <a:avLst/>
+          </a:prstGeom>
+          <a:noFill/>
+        </p:spPr>
+        <p:txBody>
+          <a:bodyPr wrap="square">
+            <a:spAutoFit/>
+          </a:bodyPr>
+          <a:lstStyle/>
+          <a:p>
+            <a:pPr algn="ctr"/>
+            <a:r>
+              <a:rPr sz="4800" b="1" i="0">
                 <a:solidFill>
                   <a:srgbClr val="FFFFFF"/>
                 </a:solidFill>
@@ -5302,99 +5022,29 @@
         </p:nvSpPr>
         <p:spPr>
           <a:xfrm>
-            <a:off x="594360" y="2980944"/>
-            <a:ext cx="11002975" cy="347472"/>
-          </a:xfrm>
-          <a:prstGeom prst="rect">
-            <a:avLst/>
-          </a:prstGeom>
-          <a:noFill/>
-        </p:spPr>
-        <p:txBody>
-          <a:bodyPr wrap="square">
-            <a:spAutoFit/>
-          </a:bodyPr>
-          <a:lstStyle/>
-          <a:p>
-            <a:pPr algn="ctr"/>
-            <a:r>
-              <a:rPr sz="2200" b="0" i="1">
-                <a:solidFill>
-                  <a:srgbClr val="8C8C8C"/>
-                </a:solidFill>
-                <a:latin typeface="Arial"/>
-              </a:rPr>
-              <a:t/>
-            </a:r>
-          </a:p>
-        </p:txBody>
-      </p:sp>
-      <p:sp>
-        <p:nvSpPr>
-          <p:cNvPr id="4" name="TextBox 3"/>
-          <p:cNvSpPr txBox="1"/>
-          <p:nvPr/>
-        </p:nvSpPr>
-        <p:spPr>
-          <a:xfrm>
-            <a:off x="594360" y="3529584"/>
-            <a:ext cx="11002975" cy="685800"/>
-          </a:xfrm>
-          <a:prstGeom prst="rect">
-            <a:avLst/>
-          </a:prstGeom>
-          <a:noFill/>
-        </p:spPr>
-        <p:txBody>
-          <a:bodyPr wrap="square">
-            <a:spAutoFit/>
-          </a:bodyPr>
-          <a:lstStyle/>
-          <a:p>
-            <a:pPr algn="ctr"/>
-            <a:r>
-              <a:rPr sz="4400" b="1" i="0">
+            <a:off x="640080" y="2985516"/>
+            <a:ext cx="10911535" cy="731520"/>
+          </a:xfrm>
+          <a:prstGeom prst="rect">
+            <a:avLst/>
+          </a:prstGeom>
+          <a:noFill/>
+        </p:spPr>
+        <p:txBody>
+          <a:bodyPr wrap="square">
+            <a:spAutoFit/>
+          </a:bodyPr>
+          <a:lstStyle/>
+          <a:p>
+            <a:pPr algn="ctr"/>
+            <a:r>
+              <a:rPr sz="4800" b="1" i="0">
                 <a:solidFill>
                   <a:srgbClr val="FFFFFF"/>
                 </a:solidFill>
                 <a:latin typeface="Arial"/>
               </a:rPr>
               <a:t>Os que em Ti se foram</a:t>
-            </a:r>
-          </a:p>
-        </p:txBody>
-      </p:sp>
-      <p:sp>
-        <p:nvSpPr>
-          <p:cNvPr id="5" name="TextBox 4"/>
-          <p:cNvSpPr txBox="1"/>
-          <p:nvPr/>
-        </p:nvSpPr>
-        <p:spPr>
-          <a:xfrm>
-            <a:off x="594360" y="4251960"/>
-            <a:ext cx="11002975" cy="347472"/>
-          </a:xfrm>
-          <a:prstGeom prst="rect">
-            <a:avLst/>
-          </a:prstGeom>
-          <a:noFill/>
-        </p:spPr>
-        <p:txBody>
-          <a:bodyPr wrap="square">
-            <a:spAutoFit/>
-          </a:bodyPr>
-          <a:lstStyle/>
-          <a:p>
-            <a:pPr algn="ctr"/>
-            <a:r>
-              <a:rPr sz="2200" b="0" i="1">
-                <a:solidFill>
-                  <a:srgbClr val="8C8C8C"/>
-                </a:solidFill>
-                <a:latin typeface="Arial"/>
-              </a:rPr>
-              <a:t/>
             </a:r>
           </a:p>
         </p:txBody>
@@ -5433,23 +5083,23 @@
         </p:nvSpPr>
         <p:spPr>
           <a:xfrm>
-            <a:off x="594360" y="2258568"/>
-            <a:ext cx="11002975" cy="685800"/>
-          </a:xfrm>
-          <a:prstGeom prst="rect">
-            <a:avLst/>
-          </a:prstGeom>
-          <a:noFill/>
-        </p:spPr>
-        <p:txBody>
-          <a:bodyPr wrap="square">
-            <a:spAutoFit/>
-          </a:bodyPr>
-          <a:lstStyle/>
-          <a:p>
-            <a:pPr algn="ctr"/>
-            <a:r>
-              <a:rPr sz="4400" b="1" i="0">
+            <a:off x="640080" y="2052828"/>
+            <a:ext cx="10911535" cy="731520"/>
+          </a:xfrm>
+          <a:prstGeom prst="rect">
+            <a:avLst/>
+          </a:prstGeom>
+          <a:noFill/>
+        </p:spPr>
+        <p:txBody>
+          <a:bodyPr wrap="square">
+            <a:spAutoFit/>
+          </a:bodyPr>
+          <a:lstStyle/>
+          <a:p>
+            <a:pPr algn="ctr"/>
+            <a:r>
+              <a:rPr sz="4800" b="1" i="0">
                 <a:solidFill>
                   <a:srgbClr val="FFFFFF"/>
                 </a:solidFill>
@@ -5468,25 +5118,60 @@
         </p:nvSpPr>
         <p:spPr>
           <a:xfrm>
-            <a:off x="594360" y="2980944"/>
-            <a:ext cx="11002975" cy="347472"/>
-          </a:xfrm>
-          <a:prstGeom prst="rect">
-            <a:avLst/>
-          </a:prstGeom>
-          <a:noFill/>
-        </p:spPr>
-        <p:txBody>
-          <a:bodyPr wrap="square">
-            <a:spAutoFit/>
-          </a:bodyPr>
-          <a:lstStyle/>
-          <a:p>
-            <a:pPr algn="ctr"/>
-            <a:r>
-              <a:rPr sz="2200" b="0" i="1">
-                <a:solidFill>
-                  <a:srgbClr val="8C8C8C"/>
+            <a:off x="640080" y="2985516"/>
+            <a:ext cx="10911535" cy="731520"/>
+          </a:xfrm>
+          <a:prstGeom prst="rect">
+            <a:avLst/>
+          </a:prstGeom>
+          <a:noFill/>
+        </p:spPr>
+        <p:txBody>
+          <a:bodyPr wrap="square">
+            <a:spAutoFit/>
+          </a:bodyPr>
+          <a:lstStyle/>
+          <a:p>
+            <a:pPr algn="ctr"/>
+            <a:r>
+              <a:rPr sz="4800" b="1" i="0">
+                <a:solidFill>
+                  <a:srgbClr val="FFFFFF"/>
+                </a:solidFill>
+                <a:latin typeface="Arial"/>
+              </a:rPr>
+              <a:t>Santo pra sempre</a:t>
+            </a:r>
+          </a:p>
+        </p:txBody>
+      </p:sp>
+      <p:sp>
+        <p:nvSpPr>
+          <p:cNvPr id="4" name="TextBox 3"/>
+          <p:cNvSpPr txBox="1"/>
+          <p:nvPr/>
+        </p:nvSpPr>
+        <p:spPr>
+          <a:xfrm>
+            <a:off x="640080" y="4128516"/>
+            <a:ext cx="10911535" cy="310896"/>
+          </a:xfrm>
+          <a:prstGeom prst="rect">
+            <a:avLst/>
+          </a:prstGeom>
+          <a:noFill/>
+        </p:spPr>
+        <p:txBody>
+          <a:bodyPr wrap="square">
+            <a:spAutoFit/>
+          </a:bodyPr>
+          <a:lstStyle/>
+          <a:p>
+            <a:pPr algn="ctr"/>
+            <a:r>
+              <a:rPr sz="2000" b="0" i="0">
+                <a:solidFill>
+                  <a:srgbClr val="828282"/>
                 </a:solidFill>
                 <a:latin typeface="Arial"/>
               </a:rPr>
@@ -5497,66 +5182,31 @@
       </p:sp>
       <p:sp>
         <p:nvSpPr>
-          <p:cNvPr id="4" name="TextBox 3"/>
-          <p:cNvSpPr txBox="1"/>
-          <p:nvPr/>
-        </p:nvSpPr>
-        <p:spPr>
-          <a:xfrm>
-            <a:off x="594360" y="3529584"/>
-            <a:ext cx="11002975" cy="685800"/>
-          </a:xfrm>
-          <a:prstGeom prst="rect">
-            <a:avLst/>
-          </a:prstGeom>
-          <a:noFill/>
-        </p:spPr>
-        <p:txBody>
-          <a:bodyPr wrap="square">
-            <a:spAutoFit/>
-          </a:bodyPr>
-          <a:lstStyle/>
-          <a:p>
-            <a:pPr algn="ctr"/>
-            <a:r>
-              <a:rPr sz="4400" b="1" i="0">
-                <a:solidFill>
-                  <a:srgbClr val="FFFFFF"/>
-                </a:solidFill>
-                <a:latin typeface="Arial"/>
-              </a:rPr>
-              <a:t>Santo pra sempre</a:t>
-            </a:r>
-          </a:p>
-        </p:txBody>
-      </p:sp>
-      <p:sp>
-        <p:nvSpPr>
           <p:cNvPr id="5" name="TextBox 4"/>
           <p:cNvSpPr txBox="1"/>
           <p:nvPr/>
         </p:nvSpPr>
         <p:spPr>
           <a:xfrm>
-            <a:off x="594360" y="4251960"/>
-            <a:ext cx="11002975" cy="347472"/>
-          </a:xfrm>
-          <a:prstGeom prst="rect">
-            <a:avLst/>
-          </a:prstGeom>
-          <a:noFill/>
-        </p:spPr>
-        <p:txBody>
-          <a:bodyPr wrap="square">
-            <a:spAutoFit/>
-          </a:bodyPr>
-          <a:lstStyle/>
-          <a:p>
-            <a:pPr algn="ctr"/>
-            <a:r>
-              <a:rPr sz="2200" b="0" i="1">
-                <a:solidFill>
-                  <a:srgbClr val="8C8C8C"/>
+            <a:off x="640080" y="4494276"/>
+            <a:ext cx="10911535" cy="310896"/>
+          </a:xfrm>
+          <a:prstGeom prst="rect">
+            <a:avLst/>
+          </a:prstGeom>
+          <a:noFill/>
+        </p:spPr>
+        <p:txBody>
+          <a:bodyPr wrap="square">
+            <a:spAutoFit/>
+          </a:bodyPr>
+          <a:lstStyle/>
+          <a:p>
+            <a:pPr algn="ctr"/>
+            <a:r>
+              <a:rPr sz="2000" b="0" i="0">
+                <a:solidFill>
+                  <a:srgbClr val="828282"/>
                 </a:solidFill>
                 <a:latin typeface="Arial"/>
               </a:rPr>
@@ -5599,23 +5249,23 @@
         </p:nvSpPr>
         <p:spPr>
           <a:xfrm>
-            <a:off x="594360" y="2258568"/>
-            <a:ext cx="11002975" cy="685800"/>
-          </a:xfrm>
-          <a:prstGeom prst="rect">
-            <a:avLst/>
-          </a:prstGeom>
-          <a:noFill/>
-        </p:spPr>
-        <p:txBody>
-          <a:bodyPr wrap="square">
-            <a:spAutoFit/>
-          </a:bodyPr>
-          <a:lstStyle/>
-          <a:p>
-            <a:pPr algn="ctr"/>
-            <a:r>
-              <a:rPr sz="4400" b="1" i="0">
+            <a:off x="640080" y="2052828"/>
+            <a:ext cx="10911535" cy="731520"/>
+          </a:xfrm>
+          <a:prstGeom prst="rect">
+            <a:avLst/>
+          </a:prstGeom>
+          <a:noFill/>
+        </p:spPr>
+        <p:txBody>
+          <a:bodyPr wrap="square">
+            <a:spAutoFit/>
+          </a:bodyPr>
+          <a:lstStyle/>
+          <a:p>
+            <a:pPr algn="ctr"/>
+            <a:r>
+              <a:rPr sz="4800" b="1" i="0">
                 <a:solidFill>
                   <a:srgbClr val="FFFFFF"/>
                 </a:solidFill>
@@ -5634,25 +5284,60 @@
         </p:nvSpPr>
         <p:spPr>
           <a:xfrm>
-            <a:off x="594360" y="2980944"/>
-            <a:ext cx="11002975" cy="347472"/>
-          </a:xfrm>
-          <a:prstGeom prst="rect">
-            <a:avLst/>
-          </a:prstGeom>
-          <a:noFill/>
-        </p:spPr>
-        <p:txBody>
-          <a:bodyPr wrap="square">
-            <a:spAutoFit/>
-          </a:bodyPr>
-          <a:lstStyle/>
-          <a:p>
-            <a:pPr algn="ctr"/>
-            <a:r>
-              <a:rPr sz="2200" b="0" i="1">
-                <a:solidFill>
-                  <a:srgbClr val="8C8C8C"/>
+            <a:off x="640080" y="2985516"/>
+            <a:ext cx="10911535" cy="731520"/>
+          </a:xfrm>
+          <a:prstGeom prst="rect">
+            <a:avLst/>
+          </a:prstGeom>
+          <a:noFill/>
+        </p:spPr>
+        <p:txBody>
+          <a:bodyPr wrap="square">
+            <a:spAutoFit/>
+          </a:bodyPr>
+          <a:lstStyle/>
+          <a:p>
+            <a:pPr algn="ctr"/>
+            <a:r>
+              <a:rPr sz="4800" b="1" i="0">
+                <a:solidFill>
+                  <a:srgbClr val="FFFFFF"/>
+                </a:solidFill>
+                <a:latin typeface="Arial"/>
+              </a:rPr>
+              <a:t>Sim, ao Rei dos Reis, "Santo"</a:t>
+            </a:r>
+          </a:p>
+        </p:txBody>
+      </p:sp>
+      <p:sp>
+        <p:nvSpPr>
+          <p:cNvPr id="4" name="TextBox 3"/>
+          <p:cNvSpPr txBox="1"/>
+          <p:nvPr/>
+        </p:nvSpPr>
+        <p:spPr>
+          <a:xfrm>
+            <a:off x="640080" y="4128516"/>
+            <a:ext cx="10911535" cy="310896"/>
+          </a:xfrm>
+          <a:prstGeom prst="rect">
+            <a:avLst/>
+          </a:prstGeom>
+          <a:noFill/>
+        </p:spPr>
+        <p:txBody>
+          <a:bodyPr wrap="square">
+            <a:spAutoFit/>
+          </a:bodyPr>
+          <a:lstStyle/>
+          <a:p>
+            <a:pPr algn="ctr"/>
+            <a:r>
+              <a:rPr sz="2000" b="0" i="0">
+                <a:solidFill>
+                  <a:srgbClr val="828282"/>
                 </a:solidFill>
                 <a:latin typeface="Arial"/>
               </a:rPr>
@@ -5663,66 +5348,31 @@
       </p:sp>
       <p:sp>
         <p:nvSpPr>
-          <p:cNvPr id="4" name="TextBox 3"/>
-          <p:cNvSpPr txBox="1"/>
-          <p:nvPr/>
-        </p:nvSpPr>
-        <p:spPr>
-          <a:xfrm>
-            <a:off x="594360" y="3529584"/>
-            <a:ext cx="11002975" cy="685800"/>
-          </a:xfrm>
-          <a:prstGeom prst="rect">
-            <a:avLst/>
-          </a:prstGeom>
-          <a:noFill/>
-        </p:spPr>
-        <p:txBody>
-          <a:bodyPr wrap="square">
-            <a:spAutoFit/>
-          </a:bodyPr>
-          <a:lstStyle/>
-          <a:p>
-            <a:pPr algn="ctr"/>
-            <a:r>
-              <a:rPr sz="4400" b="1" i="0">
-                <a:solidFill>
-                  <a:srgbClr val="FFFFFF"/>
-                </a:solidFill>
-                <a:latin typeface="Arial"/>
-              </a:rPr>
-              <a:t>Sim, ao Rei dos Reis, "Santo"</a:t>
-            </a:r>
-          </a:p>
-        </p:txBody>
-      </p:sp>
-      <p:sp>
-        <p:nvSpPr>
           <p:cNvPr id="5" name="TextBox 4"/>
           <p:cNvSpPr txBox="1"/>
           <p:nvPr/>
         </p:nvSpPr>
         <p:spPr>
           <a:xfrm>
-            <a:off x="594360" y="4251960"/>
-            <a:ext cx="11002975" cy="347472"/>
-          </a:xfrm>
-          <a:prstGeom prst="rect">
-            <a:avLst/>
-          </a:prstGeom>
-          <a:noFill/>
-        </p:spPr>
-        <p:txBody>
-          <a:bodyPr wrap="square">
-            <a:spAutoFit/>
-          </a:bodyPr>
-          <a:lstStyle/>
-          <a:p>
-            <a:pPr algn="ctr"/>
-            <a:r>
-              <a:rPr sz="2200" b="0" i="1">
-                <a:solidFill>
-                  <a:srgbClr val="8C8C8C"/>
+            <a:off x="640080" y="4494276"/>
+            <a:ext cx="10911535" cy="310896"/>
+          </a:xfrm>
+          <a:prstGeom prst="rect">
+            <a:avLst/>
+          </a:prstGeom>
+          <a:noFill/>
+        </p:spPr>
+        <p:txBody>
+          <a:bodyPr wrap="square">
+            <a:spAutoFit/>
+          </a:bodyPr>
+          <a:lstStyle/>
+          <a:p>
+            <a:pPr algn="ctr"/>
+            <a:r>
+              <a:rPr sz="2000" b="0" i="0">
+                <a:solidFill>
+                  <a:srgbClr val="828282"/>
                 </a:solidFill>
                 <a:latin typeface="Arial"/>
               </a:rPr>
@@ -5765,23 +5415,23 @@
         </p:nvSpPr>
         <p:spPr>
           <a:xfrm>
-            <a:off x="594360" y="2258568"/>
-            <a:ext cx="11002975" cy="685800"/>
-          </a:xfrm>
-          <a:prstGeom prst="rect">
-            <a:avLst/>
-          </a:prstGeom>
-          <a:noFill/>
-        </p:spPr>
-        <p:txBody>
-          <a:bodyPr wrap="square">
-            <a:spAutoFit/>
-          </a:bodyPr>
-          <a:lstStyle/>
-          <a:p>
-            <a:pPr algn="ctr"/>
-            <a:r>
-              <a:rPr sz="4400" b="1" i="0">
+            <a:off x="640080" y="2052828"/>
+            <a:ext cx="10911535" cy="731520"/>
+          </a:xfrm>
+          <a:prstGeom prst="rect">
+            <a:avLst/>
+          </a:prstGeom>
+          <a:noFill/>
+        </p:spPr>
+        <p:txBody>
+          <a:bodyPr wrap="square">
+            <a:spAutoFit/>
+          </a:bodyPr>
+          <a:lstStyle/>
+          <a:p>
+            <a:pPr algn="ctr"/>
+            <a:r>
+              <a:rPr sz="4800" b="1" i="0">
                 <a:solidFill>
                   <a:srgbClr val="FFFFFF"/>
                 </a:solidFill>
@@ -5800,25 +5450,60 @@
         </p:nvSpPr>
         <p:spPr>
           <a:xfrm>
-            <a:off x="594360" y="2980944"/>
-            <a:ext cx="11002975" cy="347472"/>
-          </a:xfrm>
-          <a:prstGeom prst="rect">
-            <a:avLst/>
-          </a:prstGeom>
-          <a:noFill/>
-        </p:spPr>
-        <p:txBody>
-          <a:bodyPr wrap="square">
-            <a:spAutoFit/>
-          </a:bodyPr>
-          <a:lstStyle/>
-          <a:p>
-            <a:pPr algn="ctr"/>
-            <a:r>
-              <a:rPr sz="2200" b="0" i="1">
-                <a:solidFill>
-                  <a:srgbClr val="8C8C8C"/>
+            <a:off x="640080" y="2985516"/>
+            <a:ext cx="10911535" cy="731520"/>
+          </a:xfrm>
+          <a:prstGeom prst="rect">
+            <a:avLst/>
+          </a:prstGeom>
+          <a:noFill/>
+        </p:spPr>
+        <p:txBody>
+          <a:bodyPr wrap="square">
+            <a:spAutoFit/>
+          </a:bodyPr>
+          <a:lstStyle/>
+          <a:p>
+            <a:pPr algn="ctr"/>
+            <a:r>
+              <a:rPr sz="4800" b="1" i="0">
+                <a:solidFill>
+                  <a:srgbClr val="FFFFFF"/>
+                </a:solidFill>
+                <a:latin typeface="Arial"/>
+              </a:rPr>
+              <a:t>Santo pra sempre</a:t>
+            </a:r>
+          </a:p>
+        </p:txBody>
+      </p:sp>
+      <p:sp>
+        <p:nvSpPr>
+          <p:cNvPr id="4" name="TextBox 3"/>
+          <p:cNvSpPr txBox="1"/>
+          <p:nvPr/>
+        </p:nvSpPr>
+        <p:spPr>
+          <a:xfrm>
+            <a:off x="640080" y="4128516"/>
+            <a:ext cx="10911535" cy="310896"/>
+          </a:xfrm>
+          <a:prstGeom prst="rect">
+            <a:avLst/>
+          </a:prstGeom>
+          <a:noFill/>
+        </p:spPr>
+        <p:txBody>
+          <a:bodyPr wrap="square">
+            <a:spAutoFit/>
+          </a:bodyPr>
+          <a:lstStyle/>
+          <a:p>
+            <a:pPr algn="ctr"/>
+            <a:r>
+              <a:rPr sz="2000" b="0" i="0">
+                <a:solidFill>
+                  <a:srgbClr val="828282"/>
                 </a:solidFill>
                 <a:latin typeface="Arial"/>
               </a:rPr>
@@ -5829,66 +5514,31 @@
       </p:sp>
       <p:sp>
         <p:nvSpPr>
-          <p:cNvPr id="4" name="TextBox 3"/>
-          <p:cNvSpPr txBox="1"/>
-          <p:nvPr/>
-        </p:nvSpPr>
-        <p:spPr>
-          <a:xfrm>
-            <a:off x="594360" y="3529584"/>
-            <a:ext cx="11002975" cy="685800"/>
-          </a:xfrm>
-          <a:prstGeom prst="rect">
-            <a:avLst/>
-          </a:prstGeom>
-          <a:noFill/>
-        </p:spPr>
-        <p:txBody>
-          <a:bodyPr wrap="square">
-            <a:spAutoFit/>
-          </a:bodyPr>
-          <a:lstStyle/>
-          <a:p>
-            <a:pPr algn="ctr"/>
-            <a:r>
-              <a:rPr sz="4400" b="1" i="0">
-                <a:solidFill>
-                  <a:srgbClr val="FFFFFF"/>
-                </a:solidFill>
-                <a:latin typeface="Arial"/>
-              </a:rPr>
-              <a:t>Santo pra sempre</a:t>
-            </a:r>
-          </a:p>
-        </p:txBody>
-      </p:sp>
-      <p:sp>
-        <p:nvSpPr>
           <p:cNvPr id="5" name="TextBox 4"/>
           <p:cNvSpPr txBox="1"/>
           <p:nvPr/>
         </p:nvSpPr>
         <p:spPr>
           <a:xfrm>
-            <a:off x="594360" y="4251960"/>
-            <a:ext cx="11002975" cy="347472"/>
-          </a:xfrm>
-          <a:prstGeom prst="rect">
-            <a:avLst/>
-          </a:prstGeom>
-          <a:noFill/>
-        </p:spPr>
-        <p:txBody>
-          <a:bodyPr wrap="square">
-            <a:spAutoFit/>
-          </a:bodyPr>
-          <a:lstStyle/>
-          <a:p>
-            <a:pPr algn="ctr"/>
-            <a:r>
-              <a:rPr sz="2200" b="0" i="1">
-                <a:solidFill>
-                  <a:srgbClr val="8C8C8C"/>
+            <a:off x="640080" y="4494276"/>
+            <a:ext cx="10911535" cy="310896"/>
+          </a:xfrm>
+          <a:prstGeom prst="rect">
+            <a:avLst/>
+          </a:prstGeom>
+          <a:noFill/>
+        </p:spPr>
+        <p:txBody>
+          <a:bodyPr wrap="square">
+            <a:spAutoFit/>
+          </a:bodyPr>
+          <a:lstStyle/>
+          <a:p>
+            <a:pPr algn="ctr"/>
+            <a:r>
+              <a:rPr sz="2000" b="0" i="0">
+                <a:solidFill>
+                  <a:srgbClr val="828282"/>
                 </a:solidFill>
                 <a:latin typeface="Arial"/>
               </a:rPr>
@@ -5931,23 +5581,23 @@
         </p:nvSpPr>
         <p:spPr>
           <a:xfrm>
-            <a:off x="594360" y="2258568"/>
-            <a:ext cx="11002975" cy="685800"/>
-          </a:xfrm>
-          <a:prstGeom prst="rect">
-            <a:avLst/>
-          </a:prstGeom>
-          <a:noFill/>
-        </p:spPr>
-        <p:txBody>
-          <a:bodyPr wrap="square">
-            <a:spAutoFit/>
-          </a:bodyPr>
-          <a:lstStyle/>
-          <a:p>
-            <a:pPr algn="ctr"/>
-            <a:r>
-              <a:rPr sz="4400" b="1" i="0">
+            <a:off x="640080" y="2052828"/>
+            <a:ext cx="10911535" cy="731520"/>
+          </a:xfrm>
+          <a:prstGeom prst="rect">
+            <a:avLst/>
+          </a:prstGeom>
+          <a:noFill/>
+        </p:spPr>
+        <p:txBody>
+          <a:bodyPr wrap="square">
+            <a:spAutoFit/>
+          </a:bodyPr>
+          <a:lstStyle/>
+          <a:p>
+            <a:pPr algn="ctr"/>
+            <a:r>
+              <a:rPr sz="4800" b="1" i="0">
                 <a:solidFill>
                   <a:srgbClr val="FFFFFF"/>
                 </a:solidFill>
@@ -5966,99 +5616,29 @@
         </p:nvSpPr>
         <p:spPr>
           <a:xfrm>
-            <a:off x="594360" y="2980944"/>
-            <a:ext cx="11002975" cy="347472"/>
-          </a:xfrm>
-          <a:prstGeom prst="rect">
-            <a:avLst/>
-          </a:prstGeom>
-          <a:noFill/>
-        </p:spPr>
-        <p:txBody>
-          <a:bodyPr wrap="square">
-            <a:spAutoFit/>
-          </a:bodyPr>
-          <a:lstStyle/>
-          <a:p>
-            <a:pPr algn="ctr"/>
-            <a:r>
-              <a:rPr sz="2200" b="0" i="1">
-                <a:solidFill>
-                  <a:srgbClr val="8C8C8C"/>
-                </a:solidFill>
-                <a:latin typeface="Arial"/>
-              </a:rPr>
-              <a:t/>
-            </a:r>
-          </a:p>
-        </p:txBody>
-      </p:sp>
-      <p:sp>
-        <p:nvSpPr>
-          <p:cNvPr id="4" name="TextBox 3"/>
-          <p:cNvSpPr txBox="1"/>
-          <p:nvPr/>
-        </p:nvSpPr>
-        <p:spPr>
-          <a:xfrm>
-            <a:off x="594360" y="3529584"/>
-            <a:ext cx="11002975" cy="685800"/>
-          </a:xfrm>
-          <a:prstGeom prst="rect">
-            <a:avLst/>
-          </a:prstGeom>
-          <a:noFill/>
-        </p:spPr>
-        <p:txBody>
-          <a:bodyPr wrap="square">
-            <a:spAutoFit/>
-          </a:bodyPr>
-          <a:lstStyle/>
-          <a:p>
-            <a:pPr algn="ctr"/>
-            <a:r>
-              <a:rPr sz="4400" b="1" i="0">
+            <a:off x="640080" y="2985516"/>
+            <a:ext cx="10911535" cy="731520"/>
+          </a:xfrm>
+          <a:prstGeom prst="rect">
+            <a:avLst/>
+          </a:prstGeom>
+          <a:noFill/>
+        </p:spPr>
+        <p:txBody>
+          <a:bodyPr wrap="square">
+            <a:spAutoFit/>
+          </a:bodyPr>
+          <a:lstStyle/>
+          <a:p>
+            <a:pPr algn="ctr"/>
+            <a:r>
+              <a:rPr sz="4800" b="1" i="0">
                 <a:solidFill>
                   <a:srgbClr val="FFFFFF"/>
                 </a:solidFill>
                 <a:latin typeface="Arial"/>
               </a:rPr>
               <a:t>Teu nome é o maior</a:t>
-            </a:r>
-          </a:p>
-        </p:txBody>
-      </p:sp>
-      <p:sp>
-        <p:nvSpPr>
-          <p:cNvPr id="5" name="TextBox 4"/>
-          <p:cNvSpPr txBox="1"/>
-          <p:nvPr/>
-        </p:nvSpPr>
-        <p:spPr>
-          <a:xfrm>
-            <a:off x="594360" y="4251960"/>
-            <a:ext cx="11002975" cy="347472"/>
-          </a:xfrm>
-          <a:prstGeom prst="rect">
-            <a:avLst/>
-          </a:prstGeom>
-          <a:noFill/>
-        </p:spPr>
-        <p:txBody>
-          <a:bodyPr wrap="square">
-            <a:spAutoFit/>
-          </a:bodyPr>
-          <a:lstStyle/>
-          <a:p>
-            <a:pPr algn="ctr"/>
-            <a:r>
-              <a:rPr sz="2200" b="0" i="1">
-                <a:solidFill>
-                  <a:srgbClr val="8C8C8C"/>
-                </a:solidFill>
-                <a:latin typeface="Arial"/>
-              </a:rPr>
-              <a:t/>
             </a:r>
           </a:p>
         </p:txBody>
@@ -6097,23 +5677,23 @@
         </p:nvSpPr>
         <p:spPr>
           <a:xfrm>
-            <a:off x="594360" y="2258568"/>
-            <a:ext cx="11002975" cy="685800"/>
-          </a:xfrm>
-          <a:prstGeom prst="rect">
-            <a:avLst/>
-          </a:prstGeom>
-          <a:noFill/>
-        </p:spPr>
-        <p:txBody>
-          <a:bodyPr wrap="square">
-            <a:spAutoFit/>
-          </a:bodyPr>
-          <a:lstStyle/>
-          <a:p>
-            <a:pPr algn="ctr"/>
-            <a:r>
-              <a:rPr sz="4400" b="1" i="0">
+            <a:off x="640080" y="2052828"/>
+            <a:ext cx="10911535" cy="731520"/>
+          </a:xfrm>
+          <a:prstGeom prst="rect">
+            <a:avLst/>
+          </a:prstGeom>
+          <a:noFill/>
+        </p:spPr>
+        <p:txBody>
+          <a:bodyPr wrap="square">
+            <a:spAutoFit/>
+          </a:bodyPr>
+          <a:lstStyle/>
+          <a:p>
+            <a:pPr algn="ctr"/>
+            <a:r>
+              <a:rPr sz="4800" b="1" i="0">
                 <a:solidFill>
                   <a:srgbClr val="FFFFFF"/>
                 </a:solidFill>
@@ -6132,99 +5712,29 @@
         </p:nvSpPr>
         <p:spPr>
           <a:xfrm>
-            <a:off x="594360" y="2980944"/>
-            <a:ext cx="11002975" cy="347472"/>
-          </a:xfrm>
-          <a:prstGeom prst="rect">
-            <a:avLst/>
-          </a:prstGeom>
-          <a:noFill/>
-        </p:spPr>
-        <p:txBody>
-          <a:bodyPr wrap="square">
-            <a:spAutoFit/>
-          </a:bodyPr>
-          <a:lstStyle/>
-          <a:p>
-            <a:pPr algn="ctr"/>
-            <a:r>
-              <a:rPr sz="2200" b="0" i="1">
-                <a:solidFill>
-                  <a:srgbClr val="8C8C8C"/>
-                </a:solidFill>
-                <a:latin typeface="Arial"/>
-              </a:rPr>
-              <a:t/>
-            </a:r>
-          </a:p>
-        </p:txBody>
-      </p:sp>
-      <p:sp>
-        <p:nvSpPr>
-          <p:cNvPr id="4" name="TextBox 3"/>
-          <p:cNvSpPr txBox="1"/>
-          <p:nvPr/>
-        </p:nvSpPr>
-        <p:spPr>
-          <a:xfrm>
-            <a:off x="594360" y="3529584"/>
-            <a:ext cx="11002975" cy="685800"/>
-          </a:xfrm>
-          <a:prstGeom prst="rect">
-            <a:avLst/>
-          </a:prstGeom>
-          <a:noFill/>
-        </p:spPr>
-        <p:txBody>
-          <a:bodyPr wrap="square">
-            <a:spAutoFit/>
-          </a:bodyPr>
-          <a:lstStyle/>
-          <a:p>
-            <a:pPr algn="ctr"/>
-            <a:r>
-              <a:rPr sz="4400" b="1" i="0">
+            <a:off x="640080" y="2985516"/>
+            <a:ext cx="10911535" cy="731520"/>
+          </a:xfrm>
+          <a:prstGeom prst="rect">
+            <a:avLst/>
+          </a:prstGeom>
+          <a:noFill/>
+        </p:spPr>
+        <p:txBody>
+          <a:bodyPr wrap="square">
+            <a:spAutoFit/>
+          </a:bodyPr>
+          <a:lstStyle/>
+          <a:p>
+            <a:pPr algn="ctr"/>
+            <a:r>
+              <a:rPr sz="4800" b="1" i="0">
                 <a:solidFill>
                   <a:srgbClr val="FFFFFF"/>
                 </a:solidFill>
                 <a:latin typeface="Arial"/>
               </a:rPr>
               <a:t>Cantando ao Cordeiro uma canção</a:t>
-            </a:r>
-          </a:p>
-        </p:txBody>
-      </p:sp>
-      <p:sp>
-        <p:nvSpPr>
-          <p:cNvPr id="5" name="TextBox 4"/>
-          <p:cNvSpPr txBox="1"/>
-          <p:nvPr/>
-        </p:nvSpPr>
-        <p:spPr>
-          <a:xfrm>
-            <a:off x="594360" y="4251960"/>
-            <a:ext cx="11002975" cy="347472"/>
-          </a:xfrm>
-          <a:prstGeom prst="rect">
-            <a:avLst/>
-          </a:prstGeom>
-          <a:noFill/>
-        </p:spPr>
-        <p:txBody>
-          <a:bodyPr wrap="square">
-            <a:spAutoFit/>
-          </a:bodyPr>
-          <a:lstStyle/>
-          <a:p>
-            <a:pPr algn="ctr"/>
-            <a:r>
-              <a:rPr sz="2200" b="0" i="1">
-                <a:solidFill>
-                  <a:srgbClr val="8C8C8C"/>
-                </a:solidFill>
-                <a:latin typeface="Arial"/>
-              </a:rPr>
-              <a:t/>
             </a:r>
           </a:p>
         </p:txBody>
@@ -6263,23 +5773,23 @@
         </p:nvSpPr>
         <p:spPr>
           <a:xfrm>
-            <a:off x="594360" y="2258568"/>
-            <a:ext cx="11002975" cy="685800"/>
-          </a:xfrm>
-          <a:prstGeom prst="rect">
-            <a:avLst/>
-          </a:prstGeom>
-          <a:noFill/>
-        </p:spPr>
-        <p:txBody>
-          <a:bodyPr wrap="square">
-            <a:spAutoFit/>
-          </a:bodyPr>
-          <a:lstStyle/>
-          <a:p>
-            <a:pPr algn="ctr"/>
-            <a:r>
-              <a:rPr sz="4400" b="1" i="0">
+            <a:off x="640080" y="2052828"/>
+            <a:ext cx="10911535" cy="731520"/>
+          </a:xfrm>
+          <a:prstGeom prst="rect">
+            <a:avLst/>
+          </a:prstGeom>
+          <a:noFill/>
+        </p:spPr>
+        <p:txBody>
+          <a:bodyPr wrap="square">
+            <a:spAutoFit/>
+          </a:bodyPr>
+          <a:lstStyle/>
+          <a:p>
+            <a:pPr algn="ctr"/>
+            <a:r>
+              <a:rPr sz="4800" b="1" i="0">
                 <a:solidFill>
                   <a:srgbClr val="FFFFFF"/>
                 </a:solidFill>
@@ -6298,99 +5808,29 @@
         </p:nvSpPr>
         <p:spPr>
           <a:xfrm>
-            <a:off x="594360" y="2980944"/>
-            <a:ext cx="11002975" cy="347472"/>
-          </a:xfrm>
-          <a:prstGeom prst="rect">
-            <a:avLst/>
-          </a:prstGeom>
-          <a:noFill/>
-        </p:spPr>
-        <p:txBody>
-          <a:bodyPr wrap="square">
-            <a:spAutoFit/>
-          </a:bodyPr>
-          <a:lstStyle/>
-          <a:p>
-            <a:pPr algn="ctr"/>
-            <a:r>
-              <a:rPr sz="2200" b="0" i="1">
-                <a:solidFill>
-                  <a:srgbClr val="8C8C8C"/>
-                </a:solidFill>
-                <a:latin typeface="Arial"/>
-              </a:rPr>
-              <a:t/>
-            </a:r>
-          </a:p>
-        </p:txBody>
-      </p:sp>
-      <p:sp>
-        <p:nvSpPr>
-          <p:cNvPr id="4" name="TextBox 3"/>
-          <p:cNvSpPr txBox="1"/>
-          <p:nvPr/>
-        </p:nvSpPr>
-        <p:spPr>
-          <a:xfrm>
-            <a:off x="594360" y="3529584"/>
-            <a:ext cx="11002975" cy="685800"/>
-          </a:xfrm>
-          <a:prstGeom prst="rect">
-            <a:avLst/>
-          </a:prstGeom>
-          <a:noFill/>
-        </p:spPr>
-        <p:txBody>
-          <a:bodyPr wrap="square">
-            <a:spAutoFit/>
-          </a:bodyPr>
-          <a:lstStyle/>
-          <a:p>
-            <a:pPr algn="ctr"/>
-            <a:r>
-              <a:rPr sz="4400" b="1" i="0">
+            <a:off x="640080" y="2985516"/>
+            <a:ext cx="10911535" cy="731520"/>
+          </a:xfrm>
+          <a:prstGeom prst="rect">
+            <a:avLst/>
+          </a:prstGeom>
+          <a:noFill/>
+        </p:spPr>
+        <p:txBody>
+          <a:bodyPr wrap="square">
+            <a:spAutoFit/>
+          </a:bodyPr>
+          <a:lstStyle/>
+          <a:p>
+            <a:pPr algn="ctr"/>
+            <a:r>
+              <a:rPr sz="4800" b="1" i="0">
                 <a:solidFill>
                   <a:srgbClr val="FFFFFF"/>
                 </a:solidFill>
                 <a:latin typeface="Arial"/>
               </a:rPr>
               <a:t>Teu nome é o maior</a:t>
-            </a:r>
-          </a:p>
-        </p:txBody>
-      </p:sp>
-      <p:sp>
-        <p:nvSpPr>
-          <p:cNvPr id="5" name="TextBox 4"/>
-          <p:cNvSpPr txBox="1"/>
-          <p:nvPr/>
-        </p:nvSpPr>
-        <p:spPr>
-          <a:xfrm>
-            <a:off x="594360" y="4251960"/>
-            <a:ext cx="11002975" cy="347472"/>
-          </a:xfrm>
-          <a:prstGeom prst="rect">
-            <a:avLst/>
-          </a:prstGeom>
-          <a:noFill/>
-        </p:spPr>
-        <p:txBody>
-          <a:bodyPr wrap="square">
-            <a:spAutoFit/>
-          </a:bodyPr>
-          <a:lstStyle/>
-          <a:p>
-            <a:pPr algn="ctr"/>
-            <a:r>
-              <a:rPr sz="2200" b="0" i="1">
-                <a:solidFill>
-                  <a:srgbClr val="8C8C8C"/>
-                </a:solidFill>
-                <a:latin typeface="Arial"/>
-              </a:rPr>
-              <a:t/>
             </a:r>
           </a:p>
         </p:txBody>
@@ -6429,23 +5869,23 @@
         </p:nvSpPr>
         <p:spPr>
           <a:xfrm>
-            <a:off x="594360" y="2258568"/>
-            <a:ext cx="11002975" cy="685800"/>
-          </a:xfrm>
-          <a:prstGeom prst="rect">
-            <a:avLst/>
-          </a:prstGeom>
-          <a:noFill/>
-        </p:spPr>
-        <p:txBody>
-          <a:bodyPr wrap="square">
-            <a:spAutoFit/>
-          </a:bodyPr>
-          <a:lstStyle/>
-          <a:p>
-            <a:pPr algn="ctr"/>
-            <a:r>
-              <a:rPr sz="4400" b="1" i="0">
+            <a:off x="640080" y="2052828"/>
+            <a:ext cx="10911535" cy="731520"/>
+          </a:xfrm>
+          <a:prstGeom prst="rect">
+            <a:avLst/>
+          </a:prstGeom>
+          <a:noFill/>
+        </p:spPr>
+        <p:txBody>
+          <a:bodyPr wrap="square">
+            <a:spAutoFit/>
+          </a:bodyPr>
+          <a:lstStyle/>
+          <a:p>
+            <a:pPr algn="ctr"/>
+            <a:r>
+              <a:rPr sz="4800" b="1" i="0">
                 <a:solidFill>
                   <a:srgbClr val="FFFFFF"/>
                 </a:solidFill>
@@ -6464,99 +5904,29 @@
         </p:nvSpPr>
         <p:spPr>
           <a:xfrm>
-            <a:off x="594360" y="2980944"/>
-            <a:ext cx="11002975" cy="347472"/>
-          </a:xfrm>
-          <a:prstGeom prst="rect">
-            <a:avLst/>
-          </a:prstGeom>
-          <a:noFill/>
-        </p:spPr>
-        <p:txBody>
-          <a:bodyPr wrap="square">
-            <a:spAutoFit/>
-          </a:bodyPr>
-          <a:lstStyle/>
-          <a:p>
-            <a:pPr algn="ctr"/>
-            <a:r>
-              <a:rPr sz="2200" b="0" i="1">
-                <a:solidFill>
-                  <a:srgbClr val="8C8C8C"/>
-                </a:solidFill>
-                <a:latin typeface="Arial"/>
-              </a:rPr>
-              <a:t/>
-            </a:r>
-          </a:p>
-        </p:txBody>
-      </p:sp>
-      <p:sp>
-        <p:nvSpPr>
-          <p:cNvPr id="4" name="TextBox 3"/>
-          <p:cNvSpPr txBox="1"/>
-          <p:nvPr/>
-        </p:nvSpPr>
-        <p:spPr>
-          <a:xfrm>
-            <a:off x="594360" y="3529584"/>
-            <a:ext cx="11002975" cy="685800"/>
-          </a:xfrm>
-          <a:prstGeom prst="rect">
-            <a:avLst/>
-          </a:prstGeom>
-          <a:noFill/>
-        </p:spPr>
-        <p:txBody>
-          <a:bodyPr wrap="square">
-            <a:spAutoFit/>
-          </a:bodyPr>
-          <a:lstStyle/>
-          <a:p>
-            <a:pPr algn="ctr"/>
-            <a:r>
-              <a:rPr sz="4400" b="1" i="0">
+            <a:off x="640080" y="2985516"/>
+            <a:ext cx="10911535" cy="731520"/>
+          </a:xfrm>
+          <a:prstGeom prst="rect">
+            <a:avLst/>
+          </a:prstGeom>
+          <a:noFill/>
+        </p:spPr>
+        <p:txBody>
+          <a:bodyPr wrap="square">
+            <a:spAutoFit/>
+          </a:bodyPr>
+          <a:lstStyle/>
+          <a:p>
+            <a:pPr algn="ctr"/>
+            <a:r>
+              <a:rPr sz="4800" b="1" i="0">
                 <a:solidFill>
                   <a:srgbClr val="FFFFFF"/>
                 </a:solidFill>
                 <a:latin typeface="Arial"/>
               </a:rPr>
               <a:t>Os tronos e domínios</a:t>
-            </a:r>
-          </a:p>
-        </p:txBody>
-      </p:sp>
-      <p:sp>
-        <p:nvSpPr>
-          <p:cNvPr id="5" name="TextBox 4"/>
-          <p:cNvSpPr txBox="1"/>
-          <p:nvPr/>
-        </p:nvSpPr>
-        <p:spPr>
-          <a:xfrm>
-            <a:off x="594360" y="4251960"/>
-            <a:ext cx="11002975" cy="347472"/>
-          </a:xfrm>
-          <a:prstGeom prst="rect">
-            <a:avLst/>
-          </a:prstGeom>
-          <a:noFill/>
-        </p:spPr>
-        <p:txBody>
-          <a:bodyPr wrap="square">
-            <a:spAutoFit/>
-          </a:bodyPr>
-          <a:lstStyle/>
-          <a:p>
-            <a:pPr algn="ctr"/>
-            <a:r>
-              <a:rPr sz="2200" b="0" i="1">
-                <a:solidFill>
-                  <a:srgbClr val="8C8C8C"/>
-                </a:solidFill>
-                <a:latin typeface="Arial"/>
-              </a:rPr>
-              <a:t/>
             </a:r>
           </a:p>
         </p:txBody>
@@ -6595,23 +5965,23 @@
         </p:nvSpPr>
         <p:spPr>
           <a:xfrm>
-            <a:off x="594360" y="2258568"/>
-            <a:ext cx="11002975" cy="685800"/>
-          </a:xfrm>
-          <a:prstGeom prst="rect">
-            <a:avLst/>
-          </a:prstGeom>
-          <a:noFill/>
-        </p:spPr>
-        <p:txBody>
-          <a:bodyPr wrap="square">
-            <a:spAutoFit/>
-          </a:bodyPr>
-          <a:lstStyle/>
-          <a:p>
-            <a:pPr algn="ctr"/>
-            <a:r>
-              <a:rPr sz="4400" b="1" i="0">
+            <a:off x="640080" y="2052828"/>
+            <a:ext cx="10911535" cy="731520"/>
+          </a:xfrm>
+          <a:prstGeom prst="rect">
+            <a:avLst/>
+          </a:prstGeom>
+          <a:noFill/>
+        </p:spPr>
+        <p:txBody>
+          <a:bodyPr wrap="square">
+            <a:spAutoFit/>
+          </a:bodyPr>
+          <a:lstStyle/>
+          <a:p>
+            <a:pPr algn="ctr"/>
+            <a:r>
+              <a:rPr sz="4800" b="1" i="0">
                 <a:solidFill>
                   <a:srgbClr val="FFFFFF"/>
                 </a:solidFill>
@@ -6630,99 +6000,29 @@
         </p:nvSpPr>
         <p:spPr>
           <a:xfrm>
-            <a:off x="594360" y="2980944"/>
-            <a:ext cx="11002975" cy="347472"/>
-          </a:xfrm>
-          <a:prstGeom prst="rect">
-            <a:avLst/>
-          </a:prstGeom>
-          <a:noFill/>
-        </p:spPr>
-        <p:txBody>
-          <a:bodyPr wrap="square">
-            <a:spAutoFit/>
-          </a:bodyPr>
-          <a:lstStyle/>
-          <a:p>
-            <a:pPr algn="ctr"/>
-            <a:r>
-              <a:rPr sz="2200" b="0" i="1">
-                <a:solidFill>
-                  <a:srgbClr val="8C8C8C"/>
-                </a:solidFill>
-                <a:latin typeface="Arial"/>
-              </a:rPr>
-              <a:t/>
-            </a:r>
-          </a:p>
-        </p:txBody>
-      </p:sp>
-      <p:sp>
-        <p:nvSpPr>
-          <p:cNvPr id="4" name="TextBox 3"/>
-          <p:cNvSpPr txBox="1"/>
-          <p:nvPr/>
-        </p:nvSpPr>
-        <p:spPr>
-          <a:xfrm>
-            <a:off x="594360" y="3529584"/>
-            <a:ext cx="11002975" cy="685800"/>
-          </a:xfrm>
-          <a:prstGeom prst="rect">
-            <a:avLst/>
-          </a:prstGeom>
-          <a:noFill/>
-        </p:spPr>
-        <p:txBody>
-          <a:bodyPr wrap="square">
-            <a:spAutoFit/>
-          </a:bodyPr>
-          <a:lstStyle/>
-          <a:p>
-            <a:pPr algn="ctr"/>
-            <a:r>
-              <a:rPr sz="4400" b="1" i="0">
+            <a:off x="640080" y="2985516"/>
+            <a:ext cx="10911535" cy="731520"/>
+          </a:xfrm>
+          <a:prstGeom prst="rect">
+            <a:avLst/>
+          </a:prstGeom>
+          <a:noFill/>
+        </p:spPr>
+        <p:txBody>
+          <a:bodyPr wrap="square">
+            <a:spAutoFit/>
+          </a:bodyPr>
+          <a:lstStyle/>
+          <a:p>
+            <a:pPr algn="ctr"/>
+            <a:r>
+              <a:rPr sz="4800" b="1" i="0">
                 <a:solidFill>
                   <a:srgbClr val="FFFFFF"/>
                 </a:solidFill>
                 <a:latin typeface="Arial"/>
               </a:rPr>
               <a:t>Teu nome é sobre todos</a:t>
-            </a:r>
-          </a:p>
-        </p:txBody>
-      </p:sp>
-      <p:sp>
-        <p:nvSpPr>
-          <p:cNvPr id="5" name="TextBox 4"/>
-          <p:cNvSpPr txBox="1"/>
-          <p:nvPr/>
-        </p:nvSpPr>
-        <p:spPr>
-          <a:xfrm>
-            <a:off x="594360" y="4251960"/>
-            <a:ext cx="11002975" cy="347472"/>
-          </a:xfrm>
-          <a:prstGeom prst="rect">
-            <a:avLst/>
-          </a:prstGeom>
-          <a:noFill/>
-        </p:spPr>
-        <p:txBody>
-          <a:bodyPr wrap="square">
-            <a:spAutoFit/>
-          </a:bodyPr>
-          <a:lstStyle/>
-          <a:p>
-            <a:pPr algn="ctr"/>
-            <a:r>
-              <a:rPr sz="2200" b="0" i="1">
-                <a:solidFill>
-                  <a:srgbClr val="8C8C8C"/>
-                </a:solidFill>
-                <a:latin typeface="Arial"/>
-              </a:rPr>
-              <a:t/>
             </a:r>
           </a:p>
         </p:txBody>
@@ -6761,23 +6061,23 @@
         </p:nvSpPr>
         <p:spPr>
           <a:xfrm>
-            <a:off x="594360" y="2258568"/>
-            <a:ext cx="11002975" cy="685800"/>
-          </a:xfrm>
-          <a:prstGeom prst="rect">
-            <a:avLst/>
-          </a:prstGeom>
-          <a:noFill/>
-        </p:spPr>
-        <p:txBody>
-          <a:bodyPr wrap="square">
-            <a:spAutoFit/>
-          </a:bodyPr>
-          <a:lstStyle/>
-          <a:p>
-            <a:pPr algn="ctr"/>
-            <a:r>
-              <a:rPr sz="4400" b="1" i="0">
+            <a:off x="640080" y="2052828"/>
+            <a:ext cx="10911535" cy="731520"/>
+          </a:xfrm>
+          <a:prstGeom prst="rect">
+            <a:avLst/>
+          </a:prstGeom>
+          <a:noFill/>
+        </p:spPr>
+        <p:txBody>
+          <a:bodyPr wrap="square">
+            <a:spAutoFit/>
+          </a:bodyPr>
+          <a:lstStyle/>
+          <a:p>
+            <a:pPr algn="ctr"/>
+            <a:r>
+              <a:rPr sz="4800" b="1" i="0">
                 <a:solidFill>
                   <a:srgbClr val="FFFFFF"/>
                 </a:solidFill>
@@ -6796,99 +6096,29 @@
         </p:nvSpPr>
         <p:spPr>
           <a:xfrm>
-            <a:off x="594360" y="2980944"/>
-            <a:ext cx="11002975" cy="347472"/>
-          </a:xfrm>
-          <a:prstGeom prst="rect">
-            <a:avLst/>
-          </a:prstGeom>
-          <a:noFill/>
-        </p:spPr>
-        <p:txBody>
-          <a:bodyPr wrap="square">
-            <a:spAutoFit/>
-          </a:bodyPr>
-          <a:lstStyle/>
-          <a:p>
-            <a:pPr algn="ctr"/>
-            <a:r>
-              <a:rPr sz="2200" b="0" i="1">
-                <a:solidFill>
-                  <a:srgbClr val="8C8C8C"/>
-                </a:solidFill>
-                <a:latin typeface="Arial"/>
-              </a:rPr>
-              <a:t/>
-            </a:r>
-          </a:p>
-        </p:txBody>
-      </p:sp>
-      <p:sp>
-        <p:nvSpPr>
-          <p:cNvPr id="4" name="TextBox 3"/>
-          <p:cNvSpPr txBox="1"/>
-          <p:nvPr/>
-        </p:nvSpPr>
-        <p:spPr>
-          <a:xfrm>
-            <a:off x="594360" y="3529584"/>
-            <a:ext cx="11002975" cy="685800"/>
-          </a:xfrm>
-          <a:prstGeom prst="rect">
-            <a:avLst/>
-          </a:prstGeom>
-          <a:noFill/>
-        </p:spPr>
-        <p:txBody>
-          <a:bodyPr wrap="square">
-            <a:spAutoFit/>
-          </a:bodyPr>
-          <a:lstStyle/>
-          <a:p>
-            <a:pPr algn="ctr"/>
-            <a:r>
-              <a:rPr sz="4400" b="1" i="0">
+            <a:off x="640080" y="2985516"/>
+            <a:ext cx="10911535" cy="731520"/>
+          </a:xfrm>
+          <a:prstGeom prst="rect">
+            <a:avLst/>
+          </a:prstGeom>
+          <a:noFill/>
+        </p:spPr>
+        <p:txBody>
+          <a:bodyPr wrap="square">
+            <a:spAutoFit/>
+          </a:bodyPr>
+          <a:lstStyle/>
+          <a:p>
+            <a:pPr algn="ctr"/>
+            <a:r>
+              <a:rPr sz="4800" b="1" i="0">
                 <a:solidFill>
                   <a:srgbClr val="FFFFFF"/>
                 </a:solidFill>
                 <a:latin typeface="Arial"/>
               </a:rPr>
               <a:t>Exaltado És, "Santo"</a:t>
-            </a:r>
-          </a:p>
-        </p:txBody>
-      </p:sp>
-      <p:sp>
-        <p:nvSpPr>
-          <p:cNvPr id="5" name="TextBox 4"/>
-          <p:cNvSpPr txBox="1"/>
-          <p:nvPr/>
-        </p:nvSpPr>
-        <p:spPr>
-          <a:xfrm>
-            <a:off x="594360" y="4251960"/>
-            <a:ext cx="11002975" cy="347472"/>
-          </a:xfrm>
-          <a:prstGeom prst="rect">
-            <a:avLst/>
-          </a:prstGeom>
-          <a:noFill/>
-        </p:spPr>
-        <p:txBody>
-          <a:bodyPr wrap="square">
-            <a:spAutoFit/>
-          </a:bodyPr>
-          <a:lstStyle/>
-          <a:p>
-            <a:pPr algn="ctr"/>
-            <a:r>
-              <a:rPr sz="2200" b="0" i="1">
-                <a:solidFill>
-                  <a:srgbClr val="8C8C8C"/>
-                </a:solidFill>
-                <a:latin typeface="Arial"/>
-              </a:rPr>
-              <a:t/>
             </a:r>
           </a:p>
         </p:txBody>
@@ -6927,23 +6157,23 @@
         </p:nvSpPr>
         <p:spPr>
           <a:xfrm>
-            <a:off x="594360" y="2258568"/>
-            <a:ext cx="11002975" cy="685800"/>
-          </a:xfrm>
-          <a:prstGeom prst="rect">
-            <a:avLst/>
-          </a:prstGeom>
-          <a:noFill/>
-        </p:spPr>
-        <p:txBody>
-          <a:bodyPr wrap="square">
-            <a:spAutoFit/>
-          </a:bodyPr>
-          <a:lstStyle/>
-          <a:p>
-            <a:pPr algn="ctr"/>
-            <a:r>
-              <a:rPr sz="4400" b="1" i="0">
+            <a:off x="640080" y="2052828"/>
+            <a:ext cx="10911535" cy="731520"/>
+          </a:xfrm>
+          <a:prstGeom prst="rect">
+            <a:avLst/>
+          </a:prstGeom>
+          <a:noFill/>
+        </p:spPr>
+        <p:txBody>
+          <a:bodyPr wrap="square">
+            <a:spAutoFit/>
+          </a:bodyPr>
+          <a:lstStyle/>
+          <a:p>
+            <a:pPr algn="ctr"/>
+            <a:r>
+              <a:rPr sz="4800" b="1" i="0">
                 <a:solidFill>
                   <a:srgbClr val="FFFFFF"/>
                 </a:solidFill>
@@ -6962,99 +6192,29 @@
         </p:nvSpPr>
         <p:spPr>
           <a:xfrm>
-            <a:off x="594360" y="2980944"/>
-            <a:ext cx="11002975" cy="347472"/>
-          </a:xfrm>
-          <a:prstGeom prst="rect">
-            <a:avLst/>
-          </a:prstGeom>
-          <a:noFill/>
-        </p:spPr>
-        <p:txBody>
-          <a:bodyPr wrap="square">
-            <a:spAutoFit/>
-          </a:bodyPr>
-          <a:lstStyle/>
-          <a:p>
-            <a:pPr algn="ctr"/>
-            <a:r>
-              <a:rPr sz="2200" b="0" i="1">
-                <a:solidFill>
-                  <a:srgbClr val="8C8C8C"/>
-                </a:solidFill>
-                <a:latin typeface="Arial"/>
-              </a:rPr>
-              <a:t/>
-            </a:r>
-          </a:p>
-        </p:txBody>
-      </p:sp>
-      <p:sp>
-        <p:nvSpPr>
-          <p:cNvPr id="4" name="TextBox 3"/>
-          <p:cNvSpPr txBox="1"/>
-          <p:nvPr/>
-        </p:nvSpPr>
-        <p:spPr>
-          <a:xfrm>
-            <a:off x="594360" y="3529584"/>
-            <a:ext cx="11002975" cy="685800"/>
-          </a:xfrm>
-          <a:prstGeom prst="rect">
-            <a:avLst/>
-          </a:prstGeom>
-          <a:noFill/>
-        </p:spPr>
-        <p:txBody>
-          <a:bodyPr wrap="square">
-            <a:spAutoFit/>
-          </a:bodyPr>
-          <a:lstStyle/>
-          <a:p>
-            <a:pPr algn="ctr"/>
-            <a:r>
-              <a:rPr sz="4400" b="1" i="0">
+            <a:off x="640080" y="2985516"/>
+            <a:ext cx="10911535" cy="731520"/>
+          </a:xfrm>
+          <a:prstGeom prst="rect">
+            <a:avLst/>
+          </a:prstGeom>
+          <a:noFill/>
+        </p:spPr>
+        <p:txBody>
+          <a:bodyPr wrap="square">
+            <a:spAutoFit/>
+          </a:bodyPr>
+          <a:lstStyle/>
+          <a:p>
+            <a:pPr algn="ctr"/>
+            <a:r>
+              <a:rPr sz="4800" b="1" i="0">
                 <a:solidFill>
                   <a:srgbClr val="FFFFFF"/>
                 </a:solidFill>
                 <a:latin typeface="Arial"/>
               </a:rPr>
               <a:t>Quem foi perdoado</a:t>
-            </a:r>
-          </a:p>
-        </p:txBody>
-      </p:sp>
-      <p:sp>
-        <p:nvSpPr>
-          <p:cNvPr id="5" name="TextBox 4"/>
-          <p:cNvSpPr txBox="1"/>
-          <p:nvPr/>
-        </p:nvSpPr>
-        <p:spPr>
-          <a:xfrm>
-            <a:off x="594360" y="4251960"/>
-            <a:ext cx="11002975" cy="347472"/>
-          </a:xfrm>
-          <a:prstGeom prst="rect">
-            <a:avLst/>
-          </a:prstGeom>
-          <a:noFill/>
-        </p:spPr>
-        <p:txBody>
-          <a:bodyPr wrap="square">
-            <a:spAutoFit/>
-          </a:bodyPr>
-          <a:lstStyle/>
-          <a:p>
-            <a:pPr algn="ctr"/>
-            <a:r>
-              <a:rPr sz="2200" b="0" i="1">
-                <a:solidFill>
-                  <a:srgbClr val="8C8C8C"/>
-                </a:solidFill>
-                <a:latin typeface="Arial"/>
-              </a:rPr>
-              <a:t/>
             </a:r>
           </a:p>
         </p:txBody>
@@ -7093,23 +6253,23 @@
         </p:nvSpPr>
         <p:spPr>
           <a:xfrm>
-            <a:off x="594360" y="1837944"/>
-            <a:ext cx="11002975" cy="685800"/>
-          </a:xfrm>
-          <a:prstGeom prst="rect">
-            <a:avLst/>
-          </a:prstGeom>
-          <a:noFill/>
-        </p:spPr>
-        <p:txBody>
-          <a:bodyPr wrap="square">
-            <a:spAutoFit/>
-          </a:bodyPr>
-          <a:lstStyle/>
-          <a:p>
-            <a:pPr algn="ctr"/>
-            <a:r>
-              <a:rPr sz="4400" b="1" i="0">
+            <a:off x="640080" y="1650492"/>
+            <a:ext cx="10911535" cy="731520"/>
+          </a:xfrm>
+          <a:prstGeom prst="rect">
+            <a:avLst/>
+          </a:prstGeom>
+          <a:noFill/>
+        </p:spPr>
+        <p:txBody>
+          <a:bodyPr wrap="square">
+            <a:spAutoFit/>
+          </a:bodyPr>
+          <a:lstStyle/>
+          <a:p>
+            <a:pPr algn="ctr"/>
+            <a:r>
+              <a:rPr sz="4800" b="1" i="0">
                 <a:solidFill>
                   <a:srgbClr val="FFFFFF"/>
                 </a:solidFill>
@@ -7128,8 +6288,8 @@
         </p:nvSpPr>
         <p:spPr>
           <a:xfrm>
-            <a:off x="594360" y="2560320"/>
-            <a:ext cx="11002975" cy="384048"/>
+            <a:off x="640080" y="2418588"/>
+            <a:ext cx="10911535" cy="365760"/>
           </a:xfrm>
           <a:prstGeom prst="rect">
             <a:avLst/>
@@ -7146,7 +6306,7 @@
             <a:r>
               <a:rPr sz="2400" b="0" i="1">
                 <a:solidFill>
-                  <a:srgbClr val="B4B4B4"/>
+                  <a:srgbClr val="AAAAAA"/>
                 </a:solidFill>
                 <a:latin typeface="Arial"/>
               </a:rPr>
@@ -7163,8 +6323,78 @@
         </p:nvSpPr>
         <p:spPr>
           <a:xfrm>
-            <a:off x="594360" y="2980944"/>
-            <a:ext cx="11002975" cy="347472"/>
+            <a:off x="640080" y="2985516"/>
+            <a:ext cx="10911535" cy="731520"/>
+          </a:xfrm>
+          <a:prstGeom prst="rect">
+            <a:avLst/>
+          </a:prstGeom>
+          <a:noFill/>
+        </p:spPr>
+        <p:txBody>
+          <a:bodyPr wrap="square">
+            <a:spAutoFit/>
+          </a:bodyPr>
+          <a:lstStyle/>
+          <a:p>
+            <a:pPr algn="ctr"/>
+            <a:r>
+              <a:rPr sz="4800" b="1" i="0">
+                <a:solidFill>
+                  <a:srgbClr val="FFFFFF"/>
+                </a:solidFill>
+                <a:latin typeface="Arial"/>
+              </a:rPr>
+              <a:t>神の子羊イエスに</a:t>
+            </a:r>
+          </a:p>
+        </p:txBody>
+      </p:sp>
+      <p:sp>
+        <p:nvSpPr>
+          <p:cNvPr id="5" name="TextBox 4"/>
+          <p:cNvSpPr txBox="1"/>
+          <p:nvPr/>
+        </p:nvSpPr>
+        <p:spPr>
+          <a:xfrm>
+            <a:off x="640080" y="3753612"/>
+            <a:ext cx="10911535" cy="365760"/>
+          </a:xfrm>
+          <a:prstGeom prst="rect">
+            <a:avLst/>
+          </a:prstGeom>
+          <a:noFill/>
+        </p:spPr>
+        <p:txBody>
+          <a:bodyPr wrap="square">
+            <a:spAutoFit/>
+          </a:bodyPr>
+          <a:lstStyle/>
+          <a:p>
+            <a:pPr algn="ctr"/>
+            <a:r>
+              <a:rPr sz="2400" b="0" i="1">
+                <a:solidFill>
+                  <a:srgbClr val="AAAAAA"/>
+                </a:solidFill>
+                <a:latin typeface="Arial"/>
+              </a:rPr>
+              <a:t>kami no kohitsuji Iesu ni</a:t>
+            </a:r>
+          </a:p>
+        </p:txBody>
+      </p:sp>
+      <p:sp>
+        <p:nvSpPr>
+          <p:cNvPr id="6" name="TextBox 5"/>
+          <p:cNvSpPr txBox="1"/>
+          <p:nvPr/>
+        </p:nvSpPr>
+        <p:spPr>
+          <a:xfrm>
+            <a:off x="640080" y="4530852"/>
+            <a:ext cx="10911535" cy="310896"/>
           </a:xfrm>
           <a:prstGeom prst="rect">
             <a:avLst/>
@@ -7181,81 +6411,11 @@
             <a:r>
               <a:rPr sz="2000" b="0" i="1">
                 <a:solidFill>
-                  <a:srgbClr val="8C8C8C"/>
-                </a:solidFill>
-                <a:latin typeface="Arial"/>
-              </a:rPr>
-              <a:t/>
-            </a:r>
-          </a:p>
-        </p:txBody>
-      </p:sp>
-      <p:sp>
-        <p:nvSpPr>
-          <p:cNvPr id="5" name="TextBox 4"/>
-          <p:cNvSpPr txBox="1"/>
-          <p:nvPr/>
-        </p:nvSpPr>
-        <p:spPr>
-          <a:xfrm>
-            <a:off x="594360" y="3529584"/>
-            <a:ext cx="11002975" cy="685800"/>
-          </a:xfrm>
-          <a:prstGeom prst="rect">
-            <a:avLst/>
-          </a:prstGeom>
-          <a:noFill/>
-        </p:spPr>
-        <p:txBody>
-          <a:bodyPr wrap="square">
-            <a:spAutoFit/>
-          </a:bodyPr>
-          <a:lstStyle/>
-          <a:p>
-            <a:pPr algn="ctr"/>
-            <a:r>
-              <a:rPr sz="4400" b="1" i="0">
-                <a:solidFill>
-                  <a:srgbClr val="FFFFFF"/>
-                </a:solidFill>
-                <a:latin typeface="Arial"/>
-              </a:rPr>
-              <a:t>神の子羊イエスに</a:t>
-            </a:r>
-          </a:p>
-        </p:txBody>
-      </p:sp>
-      <p:sp>
-        <p:nvSpPr>
-          <p:cNvPr id="6" name="TextBox 5"/>
-          <p:cNvSpPr txBox="1"/>
-          <p:nvPr/>
-        </p:nvSpPr>
-        <p:spPr>
-          <a:xfrm>
-            <a:off x="594360" y="4251960"/>
-            <a:ext cx="11002975" cy="384048"/>
-          </a:xfrm>
-          <a:prstGeom prst="rect">
-            <a:avLst/>
-          </a:prstGeom>
-          <a:noFill/>
-        </p:spPr>
-        <p:txBody>
-          <a:bodyPr wrap="square">
-            <a:spAutoFit/>
-          </a:bodyPr>
-          <a:lstStyle/>
-          <a:p>
-            <a:pPr algn="ctr"/>
-            <a:r>
-              <a:rPr sz="2400" b="0" i="1">
-                <a:solidFill>
-                  <a:srgbClr val="B4B4B4"/>
-                </a:solidFill>
-                <a:latin typeface="Arial"/>
-              </a:rPr>
-              <a:t>kami no kohitsuji Iesu ni</a:t>
+                  <a:srgbClr val="828282"/>
+                </a:solidFill>
+                <a:latin typeface="Arial"/>
+              </a:rPr>
+              <a:t>As muitas gerações</a:t>
             </a:r>
           </a:p>
         </p:txBody>
@@ -7268,8 +6428,8 @@
         </p:nvSpPr>
         <p:spPr>
           <a:xfrm>
-            <a:off x="594360" y="4672584"/>
-            <a:ext cx="11002975" cy="347472"/>
+            <a:off x="640080" y="4896612"/>
+            <a:ext cx="10911535" cy="310896"/>
           </a:xfrm>
           <a:prstGeom prst="rect">
             <a:avLst/>
@@ -7286,11 +6446,11 @@
             <a:r>
               <a:rPr sz="2000" b="0" i="1">
                 <a:solidFill>
-                  <a:srgbClr val="8C8C8C"/>
-                </a:solidFill>
-                <a:latin typeface="Arial"/>
-              </a:rPr>
-              <a:t/>
+                  <a:srgbClr val="828282"/>
+                </a:solidFill>
+                <a:latin typeface="Arial"/>
+              </a:rPr>
+              <a:t>Rendidas em louvor</a:t>
             </a:r>
           </a:p>
         </p:txBody>

--- a/output_pptx/Holy_Forever.pptx
+++ b/output_pptx/Holy_Forever.pptx
@@ -3188,6 +3188,76 @@
           </a:p>
         </p:txBody>
       </p:sp>
+      <p:sp>
+        <p:nvSpPr>
+          <p:cNvPr id="4" name="TextBox 3"/>
+          <p:cNvSpPr txBox="1"/>
+          <p:nvPr/>
+        </p:nvSpPr>
+        <p:spPr>
+          <a:xfrm>
+            <a:off x="640080" y="4128516"/>
+            <a:ext cx="10911535" cy="310896"/>
+          </a:xfrm>
+          <a:prstGeom prst="rect">
+            <a:avLst/>
+          </a:prstGeom>
+          <a:noFill/>
+        </p:spPr>
+        <p:txBody>
+          <a:bodyPr wrap="square">
+            <a:spAutoFit/>
+          </a:bodyPr>
+          <a:lstStyle/>
+          <a:p>
+            <a:pPr algn="ctr"/>
+            <a:r>
+              <a:rPr sz="2000" b="0" i="0">
+                <a:solidFill>
+                  <a:srgbClr val="828282"/>
+                </a:solidFill>
+                <a:latin typeface="Arial"/>
+              </a:rPr>
+              <a:t>多くの世代たちが</a:t>
+            </a:r>
+          </a:p>
+        </p:txBody>
+      </p:sp>
+      <p:sp>
+        <p:nvSpPr>
+          <p:cNvPr id="5" name="TextBox 4"/>
+          <p:cNvSpPr txBox="1"/>
+          <p:nvPr/>
+        </p:nvSpPr>
+        <p:spPr>
+          <a:xfrm>
+            <a:off x="640080" y="4494276"/>
+            <a:ext cx="10911535" cy="310896"/>
+          </a:xfrm>
+          <a:prstGeom prst="rect">
+            <a:avLst/>
+          </a:prstGeom>
+          <a:noFill/>
+        </p:spPr>
+        <p:txBody>
+          <a:bodyPr wrap="square">
+            <a:spAutoFit/>
+          </a:bodyPr>
+          <a:lstStyle/>
+          <a:p>
+            <a:pPr algn="ctr"/>
+            <a:r>
+              <a:rPr sz="2000" b="0" i="0">
+                <a:solidFill>
+                  <a:srgbClr val="828282"/>
+                </a:solidFill>
+                <a:latin typeface="Arial"/>
+              </a:rPr>
+              <a:t>賛美に捧げられて</a:t>
+            </a:r>
+          </a:p>
+        </p:txBody>
+      </p:sp>
     </p:spTree>
   </p:cSld>
   <p:clrMapOvr>
@@ -4595,6 +4665,76 @@
           </a:p>
         </p:txBody>
       </p:sp>
+      <p:sp>
+        <p:nvSpPr>
+          <p:cNvPr id="4" name="TextBox 3"/>
+          <p:cNvSpPr txBox="1"/>
+          <p:nvPr/>
+        </p:nvSpPr>
+        <p:spPr>
+          <a:xfrm>
+            <a:off x="640080" y="4128516"/>
+            <a:ext cx="10911535" cy="310896"/>
+          </a:xfrm>
+          <a:prstGeom prst="rect">
+            <a:avLst/>
+          </a:prstGeom>
+          <a:noFill/>
+        </p:spPr>
+        <p:txBody>
+          <a:bodyPr wrap="square">
+            <a:spAutoFit/>
+          </a:bodyPr>
+          <a:lstStyle/>
+          <a:p>
+            <a:pPr algn="ctr"/>
+            <a:r>
+              <a:rPr sz="2000" b="0" i="0">
+                <a:solidFill>
+                  <a:srgbClr val="828282"/>
+                </a:solidFill>
+                <a:latin typeface="Arial"/>
+              </a:rPr>
+              <a:t>そして贖われた</a:t>
+            </a:r>
+          </a:p>
+        </p:txBody>
+      </p:sp>
+      <p:sp>
+        <p:nvSpPr>
+          <p:cNvPr id="5" name="TextBox 4"/>
+          <p:cNvSpPr txBox="1"/>
+          <p:nvPr/>
+        </p:nvSpPr>
+        <p:spPr>
+          <a:xfrm>
+            <a:off x="640080" y="4494276"/>
+            <a:ext cx="10911535" cy="310896"/>
+          </a:xfrm>
+          <a:prstGeom prst="rect">
+            <a:avLst/>
+          </a:prstGeom>
+          <a:noFill/>
+        </p:spPr>
+        <p:txBody>
+          <a:bodyPr wrap="square">
+            <a:spAutoFit/>
+          </a:bodyPr>
+          <a:lstStyle/>
+          <a:p>
+            <a:pPr algn="ctr"/>
+            <a:r>
+              <a:rPr sz="2000" b="0" i="0">
+                <a:solidFill>
+                  <a:srgbClr val="828282"/>
+                </a:solidFill>
+                <a:latin typeface="Arial"/>
+              </a:rPr>
+              <a:t>子羊に歌を歌う</a:t>
+            </a:r>
+          </a:p>
+        </p:txBody>
+      </p:sp>
     </p:spTree>
   </p:cSld>
   <p:clrMapOvr>
@@ -4691,6 +4831,76 @@
           </a:p>
         </p:txBody>
       </p:sp>
+      <p:sp>
+        <p:nvSpPr>
+          <p:cNvPr id="4" name="TextBox 3"/>
+          <p:cNvSpPr txBox="1"/>
+          <p:nvPr/>
+        </p:nvSpPr>
+        <p:spPr>
+          <a:xfrm>
+            <a:off x="640080" y="4128516"/>
+            <a:ext cx="10911535" cy="310896"/>
+          </a:xfrm>
+          <a:prstGeom prst="rect">
+            <a:avLst/>
+          </a:prstGeom>
+          <a:noFill/>
+        </p:spPr>
+        <p:txBody>
+          <a:bodyPr wrap="square">
+            <a:spAutoFit/>
+          </a:bodyPr>
+          <a:lstStyle/>
+          <a:p>
+            <a:pPr algn="ctr"/>
+            <a:r>
+              <a:rPr sz="2000" b="0" i="0">
+                <a:solidFill>
+                  <a:srgbClr val="828282"/>
+                </a:solidFill>
+                <a:latin typeface="Arial"/>
+              </a:rPr>
+              <a:t>自由な者</a:t>
+            </a:r>
+          </a:p>
+        </p:txBody>
+      </p:sp>
+      <p:sp>
+        <p:nvSpPr>
+          <p:cNvPr id="5" name="TextBox 4"/>
+          <p:cNvSpPr txBox="1"/>
+          <p:nvPr/>
+        </p:nvSpPr>
+        <p:spPr>
+          <a:xfrm>
+            <a:off x="640080" y="4494276"/>
+            <a:ext cx="10911535" cy="310896"/>
+          </a:xfrm>
+          <a:prstGeom prst="rect">
+            <a:avLst/>
+          </a:prstGeom>
+          <a:noFill/>
+        </p:spPr>
+        <p:txBody>
+          <a:bodyPr wrap="square">
+            <a:spAutoFit/>
+          </a:bodyPr>
+          <a:lstStyle/>
+          <a:p>
+            <a:pPr algn="ctr"/>
+            <a:r>
+              <a:rPr sz="2000" b="0" i="0">
+                <a:solidFill>
+                  <a:srgbClr val="828282"/>
+                </a:solidFill>
+                <a:latin typeface="Arial"/>
+              </a:rPr>
+              <a:t>そして彼の名を担う者</a:t>
+            </a:r>
+          </a:p>
+        </p:txBody>
+      </p:sp>
     </p:spTree>
   </p:cSld>
   <p:clrMapOvr>
@@ -4787,6 +4997,76 @@
           </a:p>
         </p:txBody>
       </p:sp>
+      <p:sp>
+        <p:nvSpPr>
+          <p:cNvPr id="4" name="TextBox 3"/>
+          <p:cNvSpPr txBox="1"/>
+          <p:nvPr/>
+        </p:nvSpPr>
+        <p:spPr>
+          <a:xfrm>
+            <a:off x="640080" y="4128516"/>
+            <a:ext cx="10911535" cy="310896"/>
+          </a:xfrm>
+          <a:prstGeom prst="rect">
+            <a:avLst/>
+          </a:prstGeom>
+          <a:noFill/>
+        </p:spPr>
+        <p:txBody>
+          <a:bodyPr wrap="square">
+            <a:spAutoFit/>
+          </a:bodyPr>
+          <a:lstStyle/>
+          <a:p>
+            <a:pPr algn="ctr"/>
+            <a:r>
+              <a:rPr sz="2000" b="0" i="0">
+                <a:solidFill>
+                  <a:srgbClr val="828282"/>
+                </a:solidFill>
+                <a:latin typeface="Arial"/>
+              </a:rPr>
+              <a:t>子羊に歌を歌う</a:t>
+            </a:r>
+          </a:p>
+        </p:txBody>
+      </p:sp>
+      <p:sp>
+        <p:nvSpPr>
+          <p:cNvPr id="5" name="TextBox 4"/>
+          <p:cNvSpPr txBox="1"/>
+          <p:nvPr/>
+        </p:nvSpPr>
+        <p:spPr>
+          <a:xfrm>
+            <a:off x="640080" y="4494276"/>
+            <a:ext cx="10911535" cy="310896"/>
+          </a:xfrm>
+          <a:prstGeom prst="rect">
+            <a:avLst/>
+          </a:prstGeom>
+          <a:noFill/>
+        </p:spPr>
+        <p:txBody>
+          <a:bodyPr wrap="square">
+            <a:spAutoFit/>
+          </a:bodyPr>
+          <a:lstStyle/>
+          <a:p>
+            <a:pPr algn="ctr"/>
+            <a:r>
+              <a:rPr sz="2000" b="0" i="0">
+                <a:solidFill>
+                  <a:srgbClr val="828282"/>
+                </a:solidFill>
+                <a:latin typeface="Arial"/>
+              </a:rPr>
+              <a:t>永遠に歌おう、アーメン</a:t>
+            </a:r>
+          </a:p>
+        </p:txBody>
+      </p:sp>
     </p:spTree>
   </p:cSld>
   <p:clrMapOvr>
@@ -5049,6 +5329,76 @@
           </a:p>
         </p:txBody>
       </p:sp>
+      <p:sp>
+        <p:nvSpPr>
+          <p:cNvPr id="4" name="TextBox 3"/>
+          <p:cNvSpPr txBox="1"/>
+          <p:nvPr/>
+        </p:nvSpPr>
+        <p:spPr>
+          <a:xfrm>
+            <a:off x="640080" y="4128516"/>
+            <a:ext cx="10911535" cy="310896"/>
+          </a:xfrm>
+          <a:prstGeom prst="rect">
+            <a:avLst/>
+          </a:prstGeom>
+          <a:noFill/>
+        </p:spPr>
+        <p:txBody>
+          <a:bodyPr wrap="square">
+            <a:spAutoFit/>
+          </a:bodyPr>
+          <a:lstStyle/>
+          <a:p>
+            <a:pPr algn="ctr"/>
+            <a:r>
+              <a:rPr sz="2000" b="0" i="0">
+                <a:solidFill>
+                  <a:srgbClr val="828282"/>
+                </a:solidFill>
+                <a:latin typeface="Arial"/>
+              </a:rPr>
+              <a:t>子羊に歌を歌う</a:t>
+            </a:r>
+          </a:p>
+        </p:txBody>
+      </p:sp>
+      <p:sp>
+        <p:nvSpPr>
+          <p:cNvPr id="5" name="TextBox 4"/>
+          <p:cNvSpPr txBox="1"/>
+          <p:nvPr/>
+        </p:nvSpPr>
+        <p:spPr>
+          <a:xfrm>
+            <a:off x="640080" y="4494276"/>
+            <a:ext cx="10911535" cy="310896"/>
+          </a:xfrm>
+          <a:prstGeom prst="rect">
+            <a:avLst/>
+          </a:prstGeom>
+          <a:noFill/>
+        </p:spPr>
+        <p:txBody>
+          <a:bodyPr wrap="square">
+            <a:spAutoFit/>
+          </a:bodyPr>
+          <a:lstStyle/>
+          <a:p>
+            <a:pPr algn="ctr"/>
+            <a:r>
+              <a:rPr sz="2000" b="0" i="0">
+                <a:solidFill>
+                  <a:srgbClr val="828282"/>
+                </a:solidFill>
+                <a:latin typeface="Arial"/>
+              </a:rPr>
+              <a:t>あなたの中に去った者たち</a:t>
+            </a:r>
+          </a:p>
+        </p:txBody>
+      </p:sp>
     </p:spTree>
   </p:cSld>
   <p:clrMapOvr>
@@ -5643,6 +5993,76 @@
           </a:p>
         </p:txBody>
       </p:sp>
+      <p:sp>
+        <p:nvSpPr>
+          <p:cNvPr id="4" name="TextBox 3"/>
+          <p:cNvSpPr txBox="1"/>
+          <p:nvPr/>
+        </p:nvSpPr>
+        <p:spPr>
+          <a:xfrm>
+            <a:off x="640080" y="4128516"/>
+            <a:ext cx="10911535" cy="310896"/>
+          </a:xfrm>
+          <a:prstGeom prst="rect">
+            <a:avLst/>
+          </a:prstGeom>
+          <a:noFill/>
+        </p:spPr>
+        <p:txBody>
+          <a:bodyPr wrap="square">
+            <a:spAutoFit/>
+          </a:bodyPr>
+          <a:lstStyle/>
+          <a:p>
+            <a:pPr algn="ctr"/>
+            <a:r>
+              <a:rPr sz="2000" b="0" i="0">
+                <a:solidFill>
+                  <a:srgbClr val="828282"/>
+                </a:solidFill>
+                <a:latin typeface="Arial"/>
+              </a:rPr>
+              <a:t>あなたの名は最も高い</a:t>
+            </a:r>
+          </a:p>
+        </p:txBody>
+      </p:sp>
+      <p:sp>
+        <p:nvSpPr>
+          <p:cNvPr id="5" name="TextBox 4"/>
+          <p:cNvSpPr txBox="1"/>
+          <p:nvPr/>
+        </p:nvSpPr>
+        <p:spPr>
+          <a:xfrm>
+            <a:off x="640080" y="4494276"/>
+            <a:ext cx="10911535" cy="310896"/>
+          </a:xfrm>
+          <a:prstGeom prst="rect">
+            <a:avLst/>
+          </a:prstGeom>
+          <a:noFill/>
+        </p:spPr>
+        <p:txBody>
+          <a:bodyPr wrap="square">
+            <a:spAutoFit/>
+          </a:bodyPr>
+          <a:lstStyle/>
+          <a:p>
+            <a:pPr algn="ctr"/>
+            <a:r>
+              <a:rPr sz="2000" b="0" i="0">
+                <a:solidFill>
+                  <a:srgbClr val="828282"/>
+                </a:solidFill>
+                <a:latin typeface="Arial"/>
+              </a:rPr>
+              <a:t>あなたの名は最も大きい</a:t>
+            </a:r>
+          </a:p>
+        </p:txBody>
+      </p:sp>
     </p:spTree>
   </p:cSld>
   <p:clrMapOvr>
@@ -5739,6 +6159,76 @@
           </a:p>
         </p:txBody>
       </p:sp>
+      <p:sp>
+        <p:nvSpPr>
+          <p:cNvPr id="4" name="TextBox 3"/>
+          <p:cNvSpPr txBox="1"/>
+          <p:nvPr/>
+        </p:nvSpPr>
+        <p:spPr>
+          <a:xfrm>
+            <a:off x="640080" y="4128516"/>
+            <a:ext cx="10911535" cy="310896"/>
+          </a:xfrm>
+          <a:prstGeom prst="rect">
+            <a:avLst/>
+          </a:prstGeom>
+          <a:noFill/>
+        </p:spPr>
+        <p:txBody>
+          <a:bodyPr wrap="square">
+            <a:spAutoFit/>
+          </a:bodyPr>
+          <a:lstStyle/>
+          <a:p>
+            <a:pPr algn="ctr"/>
+            <a:r>
+              <a:rPr sz="2000" b="0" i="0">
+                <a:solidFill>
+                  <a:srgbClr val="828282"/>
+                </a:solidFill>
+                <a:latin typeface="Arial"/>
+              </a:rPr>
+              <a:t>そして信じるであろう者たち</a:t>
+            </a:r>
+          </a:p>
+        </p:txBody>
+      </p:sp>
+      <p:sp>
+        <p:nvSpPr>
+          <p:cNvPr id="5" name="TextBox 4"/>
+          <p:cNvSpPr txBox="1"/>
+          <p:nvPr/>
+        </p:nvSpPr>
+        <p:spPr>
+          <a:xfrm>
+            <a:off x="640080" y="4494276"/>
+            <a:ext cx="10911535" cy="310896"/>
+          </a:xfrm>
+          <a:prstGeom prst="rect">
+            <a:avLst/>
+          </a:prstGeom>
+          <a:noFill/>
+        </p:spPr>
+        <p:txBody>
+          <a:bodyPr wrap="square">
+            <a:spAutoFit/>
+          </a:bodyPr>
+          <a:lstStyle/>
+          <a:p>
+            <a:pPr algn="ctr"/>
+            <a:r>
+              <a:rPr sz="2000" b="0" i="0">
+                <a:solidFill>
+                  <a:srgbClr val="828282"/>
+                </a:solidFill>
+                <a:latin typeface="Arial"/>
+              </a:rPr>
+              <a:t>子羊に歌を歌う</a:t>
+            </a:r>
+          </a:p>
+        </p:txBody>
+      </p:sp>
     </p:spTree>
   </p:cSld>
   <p:clrMapOvr>
@@ -5835,6 +6325,76 @@
           </a:p>
         </p:txBody>
       </p:sp>
+      <p:sp>
+        <p:nvSpPr>
+          <p:cNvPr id="4" name="TextBox 3"/>
+          <p:cNvSpPr txBox="1"/>
+          <p:nvPr/>
+        </p:nvSpPr>
+        <p:spPr>
+          <a:xfrm>
+            <a:off x="640080" y="4128516"/>
+            <a:ext cx="10911535" cy="310896"/>
+          </a:xfrm>
+          <a:prstGeom prst="rect">
+            <a:avLst/>
+          </a:prstGeom>
+          <a:noFill/>
+        </p:spPr>
+        <p:txBody>
+          <a:bodyPr wrap="square">
+            <a:spAutoFit/>
+          </a:bodyPr>
+          <a:lstStyle/>
+          <a:p>
+            <a:pPr algn="ctr"/>
+            <a:r>
+              <a:rPr sz="2000" b="0" i="0">
+                <a:solidFill>
+                  <a:srgbClr val="828282"/>
+                </a:solidFill>
+                <a:latin typeface="Arial"/>
+              </a:rPr>
+              <a:t>あなたの名は最も高い</a:t>
+            </a:r>
+          </a:p>
+        </p:txBody>
+      </p:sp>
+      <p:sp>
+        <p:nvSpPr>
+          <p:cNvPr id="5" name="TextBox 4"/>
+          <p:cNvSpPr txBox="1"/>
+          <p:nvPr/>
+        </p:nvSpPr>
+        <p:spPr>
+          <a:xfrm>
+            <a:off x="640080" y="4494276"/>
+            <a:ext cx="10911535" cy="310896"/>
+          </a:xfrm>
+          <a:prstGeom prst="rect">
+            <a:avLst/>
+          </a:prstGeom>
+          <a:noFill/>
+        </p:spPr>
+        <p:txBody>
+          <a:bodyPr wrap="square">
+            <a:spAutoFit/>
+          </a:bodyPr>
+          <a:lstStyle/>
+          <a:p>
+            <a:pPr algn="ctr"/>
+            <a:r>
+              <a:rPr sz="2000" b="0" i="0">
+                <a:solidFill>
+                  <a:srgbClr val="828282"/>
+                </a:solidFill>
+                <a:latin typeface="Arial"/>
+              </a:rPr>
+              <a:t>あなたの名は最も大きい</a:t>
+            </a:r>
+          </a:p>
+        </p:txBody>
+      </p:sp>
     </p:spTree>
   </p:cSld>
   <p:clrMapOvr>
@@ -5931,6 +6491,76 @@
           </a:p>
         </p:txBody>
       </p:sp>
+      <p:sp>
+        <p:nvSpPr>
+          <p:cNvPr id="4" name="TextBox 3"/>
+          <p:cNvSpPr txBox="1"/>
+          <p:nvPr/>
+        </p:nvSpPr>
+        <p:spPr>
+          <a:xfrm>
+            <a:off x="640080" y="4128516"/>
+            <a:ext cx="10911535" cy="310896"/>
+          </a:xfrm>
+          <a:prstGeom prst="rect">
+            <a:avLst/>
+          </a:prstGeom>
+          <a:noFill/>
+        </p:spPr>
+        <p:txBody>
+          <a:bodyPr wrap="square">
+            <a:spAutoFit/>
+          </a:bodyPr>
+          <a:lstStyle/>
+          <a:p>
+            <a:pPr algn="ctr"/>
+            <a:r>
+              <a:rPr sz="2000" b="0" i="0">
+                <a:solidFill>
+                  <a:srgbClr val="828282"/>
+                </a:solidFill>
+                <a:latin typeface="Arial"/>
+              </a:rPr>
+              <a:t>あなたの名はすべての上に</a:t>
+            </a:r>
+          </a:p>
+        </p:txBody>
+      </p:sp>
+      <p:sp>
+        <p:nvSpPr>
+          <p:cNvPr id="5" name="TextBox 4"/>
+          <p:cNvSpPr txBox="1"/>
+          <p:nvPr/>
+        </p:nvSpPr>
+        <p:spPr>
+          <a:xfrm>
+            <a:off x="640080" y="4494276"/>
+            <a:ext cx="10911535" cy="310896"/>
+          </a:xfrm>
+          <a:prstGeom prst="rect">
+            <a:avLst/>
+          </a:prstGeom>
+          <a:noFill/>
+        </p:spPr>
+        <p:txBody>
+          <a:bodyPr wrap="square">
+            <a:spAutoFit/>
+          </a:bodyPr>
+          <a:lstStyle/>
+          <a:p>
+            <a:pPr algn="ctr"/>
+            <a:r>
+              <a:rPr sz="2000" b="0" i="0">
+                <a:solidFill>
+                  <a:srgbClr val="828282"/>
+                </a:solidFill>
+                <a:latin typeface="Arial"/>
+              </a:rPr>
+              <a:t>王座と主権</a:t>
+            </a:r>
+          </a:p>
+        </p:txBody>
+      </p:sp>
     </p:spTree>
   </p:cSld>
   <p:clrMapOvr>
@@ -6027,6 +6657,76 @@
           </a:p>
         </p:txBody>
       </p:sp>
+      <p:sp>
+        <p:nvSpPr>
+          <p:cNvPr id="4" name="TextBox 3"/>
+          <p:cNvSpPr txBox="1"/>
+          <p:nvPr/>
+        </p:nvSpPr>
+        <p:spPr>
+          <a:xfrm>
+            <a:off x="640080" y="4128516"/>
+            <a:ext cx="10911535" cy="310896"/>
+          </a:xfrm>
+          <a:prstGeom prst="rect">
+            <a:avLst/>
+          </a:prstGeom>
+          <a:noFill/>
+        </p:spPr>
+        <p:txBody>
+          <a:bodyPr wrap="square">
+            <a:spAutoFit/>
+          </a:bodyPr>
+          <a:lstStyle/>
+          <a:p>
+            <a:pPr algn="ctr"/>
+            <a:r>
+              <a:rPr sz="2000" b="0" i="0">
+                <a:solidFill>
+                  <a:srgbClr val="828282"/>
+                </a:solidFill>
+                <a:latin typeface="Arial"/>
+              </a:rPr>
+              <a:t>統治と力</a:t>
+            </a:r>
+          </a:p>
+        </p:txBody>
+      </p:sp>
+      <p:sp>
+        <p:nvSpPr>
+          <p:cNvPr id="5" name="TextBox 4"/>
+          <p:cNvSpPr txBox="1"/>
+          <p:nvPr/>
+        </p:nvSpPr>
+        <p:spPr>
+          <a:xfrm>
+            <a:off x="640080" y="4494276"/>
+            <a:ext cx="10911535" cy="310896"/>
+          </a:xfrm>
+          <a:prstGeom prst="rect">
+            <a:avLst/>
+          </a:prstGeom>
+          <a:noFill/>
+        </p:spPr>
+        <p:txBody>
+          <a:bodyPr wrap="square">
+            <a:spAutoFit/>
+          </a:bodyPr>
+          <a:lstStyle/>
+          <a:p>
+            <a:pPr algn="ctr"/>
+            <a:r>
+              <a:rPr sz="2000" b="0" i="0">
+                <a:solidFill>
+                  <a:srgbClr val="828282"/>
+                </a:solidFill>
+                <a:latin typeface="Arial"/>
+              </a:rPr>
+              <a:t>あなたの名はすべての上に</a:t>
+            </a:r>
+          </a:p>
+        </p:txBody>
+      </p:sp>
     </p:spTree>
   </p:cSld>
   <p:clrMapOvr>
@@ -6123,6 +6823,76 @@
           </a:p>
         </p:txBody>
       </p:sp>
+      <p:sp>
+        <p:nvSpPr>
+          <p:cNvPr id="4" name="TextBox 3"/>
+          <p:cNvSpPr txBox="1"/>
+          <p:nvPr/>
+        </p:nvSpPr>
+        <p:spPr>
+          <a:xfrm>
+            <a:off x="640080" y="4128516"/>
+            <a:ext cx="10911535" cy="310896"/>
+          </a:xfrm>
+          <a:prstGeom prst="rect">
+            <a:avLst/>
+          </a:prstGeom>
+          <a:noFill/>
+        </p:spPr>
+        <p:txBody>
+          <a:bodyPr wrap="square">
+            <a:spAutoFit/>
+          </a:bodyPr>
+          <a:lstStyle/>
+          <a:p>
+            <a:pPr algn="ctr"/>
+            <a:r>
+              <a:rPr sz="2000" b="0" i="0">
+                <a:solidFill>
+                  <a:srgbClr val="828282"/>
+                </a:solidFill>
+                <a:latin typeface="Arial"/>
+              </a:rPr>
+              <a:t>すべての創造物よ、「聖い」</a:t>
+            </a:r>
+          </a:p>
+        </p:txBody>
+      </p:sp>
+      <p:sp>
+        <p:nvSpPr>
+          <p:cNvPr id="5" name="TextBox 4"/>
+          <p:cNvSpPr txBox="1"/>
+          <p:nvPr/>
+        </p:nvSpPr>
+        <p:spPr>
+          <a:xfrm>
+            <a:off x="640080" y="4494276"/>
+            <a:ext cx="10911535" cy="310896"/>
+          </a:xfrm>
+          <a:prstGeom prst="rect">
+            <a:avLst/>
+          </a:prstGeom>
+          <a:noFill/>
+        </p:spPr>
+        <p:txBody>
+          <a:bodyPr wrap="square">
+            <a:spAutoFit/>
+          </a:bodyPr>
+          <a:lstStyle/>
+          <a:p>
+            <a:pPr algn="ctr"/>
+            <a:r>
+              <a:rPr sz="2000" b="0" i="0">
+                <a:solidFill>
+                  <a:srgbClr val="828282"/>
+                </a:solidFill>
+                <a:latin typeface="Arial"/>
+              </a:rPr>
+              <a:t>あなたは高められている、「聖い」</a:t>
+            </a:r>
+          </a:p>
+        </p:txBody>
+      </p:sp>
     </p:spTree>
   </p:cSld>
   <p:clrMapOvr>
@@ -6215,6 +6985,76 @@
                 <a:latin typeface="Arial"/>
               </a:rPr>
               <a:t>Quem foi perdoado</a:t>
+            </a:r>
+          </a:p>
+        </p:txBody>
+      </p:sp>
+      <p:sp>
+        <p:nvSpPr>
+          <p:cNvPr id="4" name="TextBox 3"/>
+          <p:cNvSpPr txBox="1"/>
+          <p:nvPr/>
+        </p:nvSpPr>
+        <p:spPr>
+          <a:xfrm>
+            <a:off x="640080" y="4128516"/>
+            <a:ext cx="10911535" cy="310896"/>
+          </a:xfrm>
+          <a:prstGeom prst="rect">
+            <a:avLst/>
+          </a:prstGeom>
+          <a:noFill/>
+        </p:spPr>
+        <p:txBody>
+          <a:bodyPr wrap="square">
+            <a:spAutoFit/>
+          </a:bodyPr>
+          <a:lstStyle/>
+          <a:p>
+            <a:pPr algn="ctr"/>
+            <a:r>
+              <a:rPr sz="2000" b="0" i="0">
+                <a:solidFill>
+                  <a:srgbClr val="828282"/>
+                </a:solidFill>
+                <a:latin typeface="Arial"/>
+              </a:rPr>
+              <a:t>永遠に聖い</a:t>
+            </a:r>
+          </a:p>
+        </p:txBody>
+      </p:sp>
+      <p:sp>
+        <p:nvSpPr>
+          <p:cNvPr id="5" name="TextBox 4"/>
+          <p:cNvSpPr txBox="1"/>
+          <p:nvPr/>
+        </p:nvSpPr>
+        <p:spPr>
+          <a:xfrm>
+            <a:off x="640080" y="4494276"/>
+            <a:ext cx="10911535" cy="310896"/>
+          </a:xfrm>
+          <a:prstGeom prst="rect">
+            <a:avLst/>
+          </a:prstGeom>
+          <a:noFill/>
+        </p:spPr>
+        <p:txBody>
+          <a:bodyPr wrap="square">
+            <a:spAutoFit/>
+          </a:bodyPr>
+          <a:lstStyle/>
+          <a:p>
+            <a:pPr algn="ctr"/>
+            <a:r>
+              <a:rPr sz="2000" b="0" i="0">
+                <a:solidFill>
+                  <a:srgbClr val="828282"/>
+                </a:solidFill>
+                <a:latin typeface="Arial"/>
+              </a:rPr>
+              <a:t>赦された者は</a:t>
             </a:r>
           </a:p>
         </p:txBody>
